--- a/DrillLoop_Pitch_Deck.pptx
+++ b/DrillLoop_Pitch_Deck.pptx
@@ -514,7 +514,7 @@
           <a:p>
             <a:r>
               <a:rPr lang="en-US" dirty="0"/>
-              <a:t>Open with the product promise: after a simulation exercise, evidence lives across notes, logs, timelines, and recordings. DrillLoop makes a reviewable path from that evidence to a proposed finding and then to a corrective action whose closure needs evidence. The interface and the hospital exercise shown in this deck are synthetic. This is a working hackathon MVP, not a certified emergency management product.</a:t>
+              <a:t>Open with the proposed first use case: hospital preparedness evaluators reviewing an exercise. DrillLoop makes a reviewable path from exercise records to a proposed finding and then to a corrective action whose closure needs evidence. The interface and hospital outage records are synthetic. This is a working local MVP, not a certified emergency management product.</a:t>
             </a:r>
             <a:endParaRPr lang="en-US" dirty="0"/>
           </a:p>
@@ -602,7 +602,7 @@
           <a:p>
             <a:r>
               <a:rPr lang="en-US" dirty="0"/>
-              <a:t>All commercial inputs are hypotheses in US dollars. “After costs” means assumed sales revenue minus assumed staffing and other operating costs; it is not net profit. FTE means full-time equivalent, or one person’s full-year workload. The base example combines 15 annual plans at $18,000 ($270,000), 40 single exercises at $1,500 ($60,000), one private deployment ($65,000), eight templates ($48,000), and 30 service days ($45,000), for $488,000 revenue. Assumed costs total $645,000, so the example is negative $157,000. The time-value example is 20 hours × 40% = 8 hours freed per exercise; 8 × 12 exercises = 96 hours; 96 × $65 = $6,240 of staff capacity. Capacity is not cash unless paid hours, overtime, or staffing cost actually falls.</a:t>
+              <a:t>The proposed first commercial model is a per-exercise pilot fee. No price or willingness-to-pay evidence exists, so the pitch does not present an assumed quote as a selected price. Discovery should identify the user, approver, budget owner, procurement path, and actual delivery costs. Annual organizational plans, private deployment, templates, and support are possible later models if pilot evidence and buyers support them. The separate Business Case contains illustrative price and staffing assumptions; they are not market rates, a forecast, or revenue.</a:t>
             </a:r>
             <a:endParaRPr lang="en-US" dirty="0"/>
           </a:p>
@@ -690,7 +690,7 @@
           <a:p>
             <a:r>
               <a:rPr lang="en-US" dirty="0"/>
-              <a:t>The website is built with React and TypeScript. FastAPI is the web service, and Pydantic checks the data sent to it. SQLAlchemy is the database access library. SQLite stores the local demo; PostgreSQL is available through Docker Compose. SHA-256 is a file checksum that helps detect whether an uploaded file changed; it does not prove the file is true. ReportLab makes the downloadable report. faster-whisper is optional software for turning speech into text; no speech model was run in the benchmark. Ollama is an optional local language model service for rewording an action only. The reviewer key is a demo gate, not production login. The Technical Design lists versions and licenses.</a:t>
+              <a:t>The website is built with React and TypeScript. FastAPI is the web service, and Pydantic checks the data sent to it. SQLAlchemy is the database access library. SQLite stores the local demo; PostgreSQL is available through Docker Compose. Uploaded source bytes and extracted text are stored in the configured database. The demo has a shared reviewer key, but no named-user RBAC, tenant isolation, retention/deletion controls, or security assessment. The default workflow makes no cloud model call. faster-whisper runs locally with a staged model; optional Ollama is configured as a local/private service for action wording only. Neither optional path was benchmarked. The Technical Design lists versions and licenses.</a:t>
             </a:r>
             <a:endParaRPr lang="en-US" dirty="0"/>
           </a:p>
@@ -778,7 +778,7 @@
           <a:p>
             <a:r>
               <a:rPr lang="en-US" dirty="0"/>
-              <a:t>The benchmark used the one fictional exercise included with the project. “Precision” means: of the items the program proposed, how many matched the expected labels? “Recall” means: of the expected labels, how many did the program find? Both were 100 percent on this closed sample, but the rules were written for these same labels. Nine of nine source-record IDs were present; that does not prove each source semantically supports the conclusion. The timeline matched eight explicit log times and displayed one disagreement. Action fields were 31 of 32 complete because an owner is intentionally missing. Request time and process memory exclude model inference. No real evaluator, speech-to-text accuracy test, or local LLM comparison was run.</a:t>
+              <a:t>The benchmark used the one fictional exercise included with the project. Precision and recall were 100 percent on this closed sample, but the rules were written for these same labels. Nine of nine source-record IDs were present; that does not prove each source semantically supports the conclusion. The timeline matched eight explicit log times and displayed one disagreement. Action fields were 31 of 32 complete because an owner is intentionally missing. Request time and process memory exclude model inference. No real evaluator, unfamiliar-exercise test, speech-to-text accuracy test, or local LLM comparison was run. A next evaluation should use evaluator-labeled evidence from an exercise not used to write the rules and report both missed and incorrect findings.</a:t>
             </a:r>
             <a:endParaRPr lang="en-US" dirty="0"/>
           </a:p>
@@ -866,7 +866,7 @@
           <a:p>
             <a:r>
               <a:rPr lang="en-US" dirty="0"/>
-              <a:t>Close with a concrete pilot request rather than a claim that the business case is proven. Ask for two or three hospital or municipal teams, a 90-day pilot, and evaluator access to synthetic or officially approved records with personal details removed. Measure source lookup time, corrections, finding evidence support, action ownership, and independent closure verification. Use a small pilot to test whether teams buy, integrate, or decline the workflow. The product borrows selected ideas from FEMA’s exercise guidance but is not certified; professional evaluator judgment remains authoritative.</a:t>
+              <a:t>This is a proposed discovery and pilot sequence, not a confirmed project commitment. First interview two or three prospective hospital-preparedness users and observe one current review with permission. If a partner agrees, compare existing practice and DrillLoop on the same permitted records. Ask the partner to set thresholds before the trial for report time, reviewer corrections, citation accuracy, and action-field completeness. Then use evaluator-labeled evidence from an unfamiliar exercise and report missed and incorrect findings. Select one relevant alternative with the partner for a comparable source-location, reviewer-decision, and closure-evidence workflow. No pilot partner, access, schedule, or thresholds are currently confirmed.</a:t>
             </a:r>
             <a:endParaRPr lang="en-US" dirty="0"/>
           </a:p>
@@ -1570,7 +1570,7 @@
           <a:p>
             <a:r>
               <a:rPr lang="en-US" dirty="0"/>
-              <a:t>Name the likely user and buyer separately. The evaluator uses the product in the after-action workflow; the preparedness lead is the likely buyer or sponsor. Action owners and directors have different review needs. Hospitals are a practical first wedge because power-loss exercises and preparedness planning have public examples, but that does not establish demand. Other candidate sectors are listed for discovery interviews.</a:t>
+              <a:t>The hospital tabletop review is the proposed initial use case, not a confirmed customer or pilot. The candidate user is an exercise evaluator or preparedness staff member. A preparedness lead or exercise sponsor may approve the report; the actual buyer and budget owner are unknown. Discovery needs to identify who prepares the report, approves findings, owns the budget, and controls access to exercise data. No customer interviews or purchasing-path validation are recorded.</a:t>
             </a:r>
             <a:endParaRPr lang="en-US" dirty="0"/>
           </a:p>
@@ -2302,25 +2302,25 @@
         <p:spPr>
           <a:xfrm>
             <a:off x="777240" y="749808"/>
-            <a:ext cx="6035040" cy="256032"/>
-          </a:xfrm>
-          <a:prstGeom prst="rect">
-            <a:avLst/>
-          </a:prstGeom>
-          <a:noFill/>
-          <a:ln/>
-        </p:spPr>
-        <p:txBody>
-          <a:bodyPr wrap="square" lIns="0" tIns="0" rIns="0" bIns="0" rtlCol="0" anchor="ctr">
-            <a:normAutofit/>
-          </a:bodyPr>
-          <a:lstStyle/>
-          <a:p>
-            <a:pPr indent="0" marL="0">
-              <a:buNone/>
-            </a:pPr>
-            <a:r>
-              <a:rPr lang="en-US" sz="1000" b="1" spc="150" kern="0" dirty="0">
+            <a:ext cx="6309360" cy="256032"/>
+          </a:xfrm>
+          <a:prstGeom prst="rect">
+            <a:avLst/>
+          </a:prstGeom>
+          <a:noFill/>
+          <a:ln/>
+        </p:spPr>
+        <p:txBody>
+          <a:bodyPr wrap="square" lIns="0" tIns="0" rIns="0" bIns="0" rtlCol="0" anchor="ctr">
+            <a:normAutofit/>
+          </a:bodyPr>
+          <a:lstStyle/>
+          <a:p>
+            <a:pPr indent="0" marL="0">
+              <a:buNone/>
+            </a:pPr>
+            <a:r>
+              <a:rPr lang="en-US" sz="950" b="1" spc="120" kern="0" dirty="0">
                 <a:solidFill>
                   <a:srgbClr val="71C6BD"/>
                 </a:solidFill>
@@ -2328,9 +2328,9 @@
                 <a:ea typeface="Aptos" pitchFamily="34" charset="-122"/>
                 <a:cs typeface="Aptos" pitchFamily="34" charset="-120"/>
               </a:rPr>
-              <a:t>EUREKA  /  PRODUCT PITCH</a:t>
-            </a:r>
-            <a:endParaRPr lang="en-US" sz="1000" dirty="0"/>
+              <a:t>EUREKA  /  PUBLIC SAFETY INTELLIGENCE</a:t>
+            </a:r>
+            <a:endParaRPr lang="en-US" sz="950" dirty="0"/>
           </a:p>
         </p:txBody>
       </p:sp>
@@ -2410,7 +2410,7 @@
                 <a:ea typeface="Aptos Display" pitchFamily="34" charset="-122"/>
                 <a:cs typeface="Aptos Display" pitchFamily="34" charset="-120"/>
               </a:rPr>
-              <a:t>From exercise notes to findings a person can review and improvements a person can verify.</a:t>
+              <a:t>Evidence-Linked Exercise Review and Action Closure</a:t>
             </a:r>
             <a:endParaRPr lang="en-US" sz="2500" dirty="0"/>
           </a:p>
@@ -2443,7 +2443,7 @@
               <a:buNone/>
             </a:pPr>
             <a:r>
-              <a:rPr lang="en-US" sz="1500" dirty="0">
+              <a:rPr lang="en-US" sz="1400" dirty="0">
                 <a:solidFill>
                   <a:srgbClr val="B5C9CD"/>
                 </a:solidFill>
@@ -2451,9 +2451,9 @@
                 <a:ea typeface="Aptos" pitchFamily="34" charset="-122"/>
                 <a:cs typeface="Aptos" pitchFamily="34" charset="-120"/>
               </a:rPr>
-              <a:t>Every proposed finding links back to its source.</a:t>
-            </a:r>
-            <a:endParaRPr lang="en-US" sz="1500" dirty="0"/>
+              <a:t>For hospital preparedness evaluators · synthetic demo</a:t>
+            </a:r>
+            <a:endParaRPr lang="en-US" sz="1400" dirty="0"/>
           </a:p>
         </p:txBody>
       </p:sp>
@@ -2838,7 +2838,7 @@
                 <a:ea typeface="Aptos" pitchFamily="34" charset="-122"/>
                 <a:cs typeface="Aptos" pitchFamily="34" charset="-120"/>
               </a:rPr>
-              <a:t>COMMERCIAL HYPOTHESES</a:t>
+              <a:t>COMMERCIAL HYPOTHESIS</a:t>
             </a:r>
             <a:endParaRPr lang="en-US" sz="900" dirty="0"/>
           </a:p>
@@ -2879,7 +2879,7 @@
                 <a:ea typeface="Aptos Display" pitchFamily="34" charset="-122"/>
                 <a:cs typeface="Aptos Display" pitchFamily="34" charset="-120"/>
               </a:rPr>
-              <a:t>Test pricing against measured value and delivery cost</a:t>
+              <a:t>Start with a per-exercise pilot fee</a:t>
             </a:r>
             <a:endParaRPr lang="en-US" sz="2600" dirty="0"/>
           </a:p>
@@ -2920,7 +2920,7 @@
                 <a:ea typeface="Aptos" pitchFamily="34" charset="-122"/>
                 <a:cs typeface="Aptos" pitchFamily="34" charset="-120"/>
               </a:rPr>
-              <a:t>All prices and financials are illustrative assumptions, not market quotes or a forecast.</a:t>
+              <a:t>This is the first model to validate; no price, buyer demand, or revenue has been established.</a:t>
             </a:r>
             <a:endParaRPr lang="en-US" sz="1130" dirty="0"/>
           </a:p>
@@ -2934,12 +2934,208 @@
         </p:nvSpPr>
         <p:spPr>
           <a:xfrm>
-            <a:off x="685800" y="1737360"/>
-            <a:ext cx="3794760" cy="3566160"/>
+            <a:off x="749808" y="1828800"/>
+            <a:ext cx="3337560" cy="3520440"/>
           </a:xfrm>
           <a:prstGeom prst="roundRect">
             <a:avLst>
-              <a:gd name="adj" fmla="val 3077"/>
+              <a:gd name="adj" fmla="val 3288"/>
+            </a:avLst>
+          </a:prstGeom>
+          <a:solidFill>
+            <a:srgbClr val="173747"/>
+          </a:solidFill>
+          <a:ln w="11430">
+            <a:solidFill>
+              <a:srgbClr val="173747"/>
+            </a:solidFill>
+            <a:prstDash val="solid"/>
+          </a:ln>
+        </p:spPr>
+      </p:sp>
+      <p:sp>
+        <p:nvSpPr>
+          <p:cNvPr id="6" name="Shape 4"/>
+          <p:cNvSpPr/>
+          <p:nvPr/>
+        </p:nvSpPr>
+        <p:spPr>
+          <a:xfrm>
+            <a:off x="1024128" y="2139696"/>
+            <a:ext cx="1737360" cy="265176"/>
+          </a:xfrm>
+          <a:prstGeom prst="roundRect">
+            <a:avLst>
+              <a:gd name="adj" fmla="val 41379"/>
+            </a:avLst>
+          </a:prstGeom>
+          <a:solidFill>
+            <a:srgbClr val="21505C"/>
+          </a:solidFill>
+          <a:ln w="12700">
+            <a:solidFill>
+              <a:srgbClr val="21505C">
+                <a:alpha val="0"/>
+              </a:srgbClr>
+            </a:solidFill>
+            <a:prstDash val="solid"/>
+          </a:ln>
+        </p:spPr>
+      </p:sp>
+      <p:sp>
+        <p:nvSpPr>
+          <p:cNvPr id="7" name="Text 5"/>
+          <p:cNvSpPr/>
+          <p:nvPr/>
+        </p:nvSpPr>
+        <p:spPr>
+          <a:xfrm>
+            <a:off x="1097280" y="2153412"/>
+            <a:ext cx="1591056" cy="219456"/>
+          </a:xfrm>
+          <a:prstGeom prst="rect">
+            <a:avLst/>
+          </a:prstGeom>
+          <a:noFill/>
+          <a:ln/>
+        </p:spPr>
+        <p:txBody>
+          <a:bodyPr wrap="square" lIns="0" tIns="0" rIns="0" bIns="0" rtlCol="0" anchor="ctr">
+            <a:normAutofit/>
+          </a:bodyPr>
+          <a:lstStyle/>
+          <a:p>
+            <a:pPr algn="ctr" indent="0" marL="0">
+              <a:buNone/>
+            </a:pPr>
+            <a:r>
+              <a:rPr lang="en-US" sz="850" b="1" dirty="0">
+                <a:solidFill>
+                  <a:srgbClr val="A6E0D8"/>
+                </a:solidFill>
+                <a:latin typeface="Aptos" pitchFamily="34" charset="0"/>
+                <a:ea typeface="Aptos" pitchFamily="34" charset="-122"/>
+                <a:cs typeface="Aptos" pitchFamily="34" charset="-120"/>
+              </a:rPr>
+              <a:t>FIRST MODEL TO TEST</a:t>
+            </a:r>
+            <a:endParaRPr lang="en-US" sz="850" dirty="0"/>
+          </a:p>
+        </p:txBody>
+      </p:sp>
+      <p:sp>
+        <p:nvSpPr>
+          <p:cNvPr id="8" name="Text 6"/>
+          <p:cNvSpPr/>
+          <p:nvPr/>
+        </p:nvSpPr>
+        <p:spPr>
+          <a:xfrm>
+            <a:off x="1024128" y="2706624"/>
+            <a:ext cx="2697480" cy="822960"/>
+          </a:xfrm>
+          <a:prstGeom prst="rect">
+            <a:avLst/>
+          </a:prstGeom>
+          <a:noFill/>
+          <a:ln/>
+        </p:spPr>
+        <p:txBody>
+          <a:bodyPr wrap="square" lIns="0" tIns="0" rIns="0" bIns="0" rtlCol="0" anchor="t">
+            <a:normAutofit/>
+          </a:bodyPr>
+          <a:lstStyle/>
+          <a:p>
+            <a:pPr indent="0" marL="0">
+              <a:buNone/>
+            </a:pPr>
+            <a:r>
+              <a:rPr lang="en-US" sz="2700" b="1" dirty="0">
+                <a:solidFill>
+                  <a:srgbClr val="FFFFFF"/>
+                </a:solidFill>
+                <a:latin typeface="Aptos Display" pitchFamily="34" charset="0"/>
+                <a:ea typeface="Aptos Display" pitchFamily="34" charset="-122"/>
+                <a:cs typeface="Aptos Display" pitchFamily="34" charset="-120"/>
+              </a:rPr>
+              <a:t>Per-exercise</a:t>
+            </a:r>
+            <a:endParaRPr lang="en-US" sz="2700" dirty="0"/>
+          </a:p>
+          <a:p>
+            <a:pPr indent="0" marL="0">
+              <a:buNone/>
+            </a:pPr>
+            <a:r>
+              <a:rPr lang="en-US" sz="2700" b="1" dirty="0">
+                <a:solidFill>
+                  <a:srgbClr val="FFFFFF"/>
+                </a:solidFill>
+                <a:latin typeface="Aptos Display" pitchFamily="34" charset="0"/>
+                <a:ea typeface="Aptos Display" pitchFamily="34" charset="-122"/>
+                <a:cs typeface="Aptos Display" pitchFamily="34" charset="-120"/>
+              </a:rPr>
+              <a:t>pilot fee</a:t>
+            </a:r>
+            <a:endParaRPr lang="en-US" sz="2700" dirty="0"/>
+          </a:p>
+        </p:txBody>
+      </p:sp>
+      <p:sp>
+        <p:nvSpPr>
+          <p:cNvPr id="9" name="Text 7"/>
+          <p:cNvSpPr/>
+          <p:nvPr/>
+        </p:nvSpPr>
+        <p:spPr>
+          <a:xfrm>
+            <a:off x="1024128" y="3904488"/>
+            <a:ext cx="2724912" cy="786384"/>
+          </a:xfrm>
+          <a:prstGeom prst="rect">
+            <a:avLst/>
+          </a:prstGeom>
+          <a:noFill/>
+          <a:ln/>
+        </p:spPr>
+        <p:txBody>
+          <a:bodyPr wrap="square" lIns="0" tIns="0" rIns="0" bIns="0" rtlCol="0" anchor="t">
+            <a:normAutofit/>
+          </a:bodyPr>
+          <a:lstStyle/>
+          <a:p>
+            <a:pPr indent="0" marL="0">
+              <a:buNone/>
+            </a:pPr>
+            <a:r>
+              <a:rPr lang="en-US" sz="1100" dirty="0">
+                <a:solidFill>
+                  <a:srgbClr val="C2D4D6"/>
+                </a:solidFill>
+                <a:latin typeface="Aptos" pitchFamily="34" charset="0"/>
+                <a:ea typeface="Aptos" pitchFamily="34" charset="-122"/>
+                <a:cs typeface="Aptos" pitchFamily="34" charset="-120"/>
+              </a:rPr>
+              <a:t>Price to be set with the prospective buyer after delivery effort and procurement path are understood.</a:t>
+            </a:r>
+            <a:endParaRPr lang="en-US" sz="1100" dirty="0"/>
+          </a:p>
+        </p:txBody>
+      </p:sp>
+      <p:sp>
+        <p:nvSpPr>
+          <p:cNvPr id="10" name="Shape 8"/>
+          <p:cNvSpPr/>
+          <p:nvPr/>
+        </p:nvSpPr>
+        <p:spPr>
+          <a:xfrm>
+            <a:off x="4498848" y="1847088"/>
+            <a:ext cx="6784848" cy="914400"/>
+          </a:xfrm>
+          <a:prstGeom prst="roundRect">
+            <a:avLst>
+              <a:gd name="adj" fmla="val 12000"/>
             </a:avLst>
           </a:prstGeom>
           <a:solidFill>
@@ -2955,14 +3151,14 @@
       </p:sp>
       <p:sp>
         <p:nvSpPr>
-          <p:cNvPr id="6" name="Text 4"/>
-          <p:cNvSpPr/>
-          <p:nvPr/>
-        </p:nvSpPr>
-        <p:spPr>
-          <a:xfrm>
-            <a:off x="914400" y="1965960"/>
-            <a:ext cx="2286000" cy="228600"/>
+          <p:cNvPr id="11" name="Text 9"/>
+          <p:cNvSpPr/>
+          <p:nvPr/>
+        </p:nvSpPr>
+        <p:spPr>
+          <a:xfrm>
+            <a:off x="4736592" y="2002536"/>
+            <a:ext cx="1005840" cy="182880"/>
           </a:xfrm>
           <a:prstGeom prst="rect">
             <a:avLst/>
@@ -2988,7 +3184,7 @@
                 <a:ea typeface="Aptos" pitchFamily="34" charset="-122"/>
                 <a:cs typeface="Aptos" pitchFamily="34" charset="-120"/>
               </a:rPr>
-              <a:t>PRICE PROBES</a:t>
+              <a:t>BUYER</a:t>
             </a:r>
             <a:endParaRPr lang="en-US" sz="850" dirty="0"/>
           </a:p>
@@ -2996,73 +3192,32 @@
       </p:sp>
       <p:sp>
         <p:nvSpPr>
-          <p:cNvPr id="7" name="Text 5"/>
-          <p:cNvSpPr/>
-          <p:nvPr/>
-        </p:nvSpPr>
-        <p:spPr>
-          <a:xfrm>
-            <a:off x="914400" y="2377440"/>
-            <a:ext cx="2148840" cy="246888"/>
-          </a:xfrm>
-          <a:prstGeom prst="rect">
-            <a:avLst/>
-          </a:prstGeom>
-          <a:noFill/>
-          <a:ln/>
-        </p:spPr>
-        <p:txBody>
-          <a:bodyPr wrap="square" lIns="0" tIns="0" rIns="0" bIns="0" rtlCol="0" anchor="ctr">
-            <a:normAutofit/>
-          </a:bodyPr>
-          <a:lstStyle/>
-          <a:p>
-            <a:pPr indent="0" marL="0">
-              <a:buNone/>
-            </a:pPr>
-            <a:r>
-              <a:rPr lang="en-US" sz="1000" dirty="0">
-                <a:solidFill>
-                  <a:srgbClr val="253E4D"/>
-                </a:solidFill>
-                <a:latin typeface="Aptos" pitchFamily="34" charset="0"/>
-                <a:ea typeface="Aptos" pitchFamily="34" charset="-122"/>
-                <a:cs typeface="Aptos" pitchFamily="34" charset="-120"/>
-              </a:rPr>
-              <a:t>Per exercise</a:t>
-            </a:r>
-            <a:endParaRPr lang="en-US" sz="1000" dirty="0"/>
-          </a:p>
-        </p:txBody>
-      </p:sp>
-      <p:sp>
-        <p:nvSpPr>
-          <p:cNvPr id="8" name="Text 6"/>
-          <p:cNvSpPr/>
-          <p:nvPr/>
-        </p:nvSpPr>
-        <p:spPr>
-          <a:xfrm>
-            <a:off x="3035808" y="2377440"/>
-            <a:ext cx="1097280" cy="246888"/>
-          </a:xfrm>
-          <a:prstGeom prst="rect">
-            <a:avLst/>
-          </a:prstGeom>
-          <a:noFill/>
-          <a:ln/>
-        </p:spPr>
-        <p:txBody>
-          <a:bodyPr wrap="square" lIns="0" tIns="0" rIns="0" bIns="0" rtlCol="0" anchor="ctr">
-            <a:normAutofit/>
-          </a:bodyPr>
-          <a:lstStyle/>
-          <a:p>
-            <a:pPr algn="r" indent="0" marL="0">
-              <a:buNone/>
-            </a:pPr>
-            <a:r>
-              <a:rPr lang="en-US" sz="1000" b="1" dirty="0">
+          <p:cNvPr id="12" name="Text 10"/>
+          <p:cNvSpPr/>
+          <p:nvPr/>
+        </p:nvSpPr>
+        <p:spPr>
+          <a:xfrm>
+            <a:off x="5779008" y="1975104"/>
+            <a:ext cx="5138928" cy="621792"/>
+          </a:xfrm>
+          <a:prstGeom prst="rect">
+            <a:avLst/>
+          </a:prstGeom>
+          <a:noFill/>
+          <a:ln/>
+        </p:spPr>
+        <p:txBody>
+          <a:bodyPr wrap="square" lIns="0" tIns="0" rIns="0" bIns="0" rtlCol="0" anchor="t">
+            <a:normAutofit/>
+          </a:bodyPr>
+          <a:lstStyle/>
+          <a:p>
+            <a:pPr indent="0" marL="0">
+              <a:buNone/>
+            </a:pPr>
+            <a:r>
+              <a:rPr lang="en-US" sz="1200" b="1" dirty="0">
                 <a:solidFill>
                   <a:srgbClr val="173747"/>
                 </a:solidFill>
@@ -3070,30 +3225,34 @@
                 <a:ea typeface="Aptos" pitchFamily="34" charset="-122"/>
                 <a:cs typeface="Aptos" pitchFamily="34" charset="-120"/>
               </a:rPr>
-              <a:t>$1,500</a:t>
-            </a:r>
-            <a:endParaRPr lang="en-US" sz="1000" dirty="0"/>
-          </a:p>
-        </p:txBody>
-      </p:sp>
-      <p:sp>
-        <p:nvSpPr>
-          <p:cNvPr id="9" name="Shape 7"/>
-          <p:cNvSpPr/>
-          <p:nvPr/>
-        </p:nvSpPr>
-        <p:spPr>
-          <a:xfrm>
-            <a:off x="914400" y="2761488"/>
-            <a:ext cx="3200400" cy="0"/>
-          </a:xfrm>
-          <a:prstGeom prst="line">
-            <a:avLst/>
-          </a:prstGeom>
-          <a:noFill/>
-          <a:ln w="8890">
+              <a:t>Who owns the budget and approves an exercise-level purchase?</a:t>
+            </a:r>
+            <a:endParaRPr lang="en-US" sz="1200" dirty="0"/>
+          </a:p>
+        </p:txBody>
+      </p:sp>
+      <p:sp>
+        <p:nvSpPr>
+          <p:cNvPr id="13" name="Shape 11"/>
+          <p:cNvSpPr/>
+          <p:nvPr/>
+        </p:nvSpPr>
+        <p:spPr>
+          <a:xfrm>
+            <a:off x="4498848" y="2962656"/>
+            <a:ext cx="6784848" cy="914400"/>
+          </a:xfrm>
+          <a:prstGeom prst="roundRect">
+            <a:avLst>
+              <a:gd name="adj" fmla="val 12000"/>
+            </a:avLst>
+          </a:prstGeom>
+          <a:solidFill>
+            <a:srgbClr val="FFFFFF"/>
+          </a:solidFill>
+          <a:ln w="11430">
             <a:solidFill>
-              <a:srgbClr val="E5EBEC"/>
+              <a:srgbClr val="DCE7E8"/>
             </a:solidFill>
             <a:prstDash val="solid"/>
           </a:ln>
@@ -3101,73 +3260,73 @@
       </p:sp>
       <p:sp>
         <p:nvSpPr>
-          <p:cNvPr id="10" name="Text 8"/>
-          <p:cNvSpPr/>
-          <p:nvPr/>
-        </p:nvSpPr>
-        <p:spPr>
-          <a:xfrm>
-            <a:off x="914400" y="2889504"/>
-            <a:ext cx="2148840" cy="246888"/>
-          </a:xfrm>
-          <a:prstGeom prst="rect">
-            <a:avLst/>
-          </a:prstGeom>
-          <a:noFill/>
-          <a:ln/>
-        </p:spPr>
-        <p:txBody>
-          <a:bodyPr wrap="square" lIns="0" tIns="0" rIns="0" bIns="0" rtlCol="0" anchor="ctr">
-            <a:normAutofit/>
-          </a:bodyPr>
-          <a:lstStyle/>
-          <a:p>
-            <a:pPr indent="0" marL="0">
-              <a:buNone/>
-            </a:pPr>
-            <a:r>
-              <a:rPr lang="en-US" sz="1000" dirty="0">
-                <a:solidFill>
-                  <a:srgbClr val="253E4D"/>
-                </a:solidFill>
-                <a:latin typeface="Aptos" pitchFamily="34" charset="0"/>
-                <a:ea typeface="Aptos" pitchFamily="34" charset="-122"/>
-                <a:cs typeface="Aptos" pitchFamily="34" charset="-120"/>
-              </a:rPr>
-              <a:t>Annual organization · up to 12</a:t>
-            </a:r>
-            <a:endParaRPr lang="en-US" sz="1000" dirty="0"/>
-          </a:p>
-        </p:txBody>
-      </p:sp>
-      <p:sp>
-        <p:nvSpPr>
-          <p:cNvPr id="11" name="Text 9"/>
-          <p:cNvSpPr/>
-          <p:nvPr/>
-        </p:nvSpPr>
-        <p:spPr>
-          <a:xfrm>
-            <a:off x="3035808" y="2889504"/>
-            <a:ext cx="1097280" cy="246888"/>
-          </a:xfrm>
-          <a:prstGeom prst="rect">
-            <a:avLst/>
-          </a:prstGeom>
-          <a:noFill/>
-          <a:ln/>
-        </p:spPr>
-        <p:txBody>
-          <a:bodyPr wrap="square" lIns="0" tIns="0" rIns="0" bIns="0" rtlCol="0" anchor="ctr">
-            <a:normAutofit/>
-          </a:bodyPr>
-          <a:lstStyle/>
-          <a:p>
-            <a:pPr algn="r" indent="0" marL="0">
-              <a:buNone/>
-            </a:pPr>
-            <a:r>
-              <a:rPr lang="en-US" sz="1000" b="1" dirty="0">
+          <p:cNvPr id="14" name="Text 12"/>
+          <p:cNvSpPr/>
+          <p:nvPr/>
+        </p:nvSpPr>
+        <p:spPr>
+          <a:xfrm>
+            <a:off x="4736592" y="3118104"/>
+            <a:ext cx="1005840" cy="182880"/>
+          </a:xfrm>
+          <a:prstGeom prst="rect">
+            <a:avLst/>
+          </a:prstGeom>
+          <a:noFill/>
+          <a:ln/>
+        </p:spPr>
+        <p:txBody>
+          <a:bodyPr wrap="square" lIns="0" tIns="0" rIns="0" bIns="0" rtlCol="0" anchor="ctr">
+            <a:normAutofit/>
+          </a:bodyPr>
+          <a:lstStyle/>
+          <a:p>
+            <a:pPr indent="0" marL="0">
+              <a:buNone/>
+            </a:pPr>
+            <a:r>
+              <a:rPr lang="en-US" sz="850" b="1" spc="80" kern="0" dirty="0">
+                <a:solidFill>
+                  <a:srgbClr val="0D8F89"/>
+                </a:solidFill>
+                <a:latin typeface="Aptos" pitchFamily="34" charset="0"/>
+                <a:ea typeface="Aptos" pitchFamily="34" charset="-122"/>
+                <a:cs typeface="Aptos" pitchFamily="34" charset="-120"/>
+              </a:rPr>
+              <a:t>VALUE</a:t>
+            </a:r>
+            <a:endParaRPr lang="en-US" sz="850" dirty="0"/>
+          </a:p>
+        </p:txBody>
+      </p:sp>
+      <p:sp>
+        <p:nvSpPr>
+          <p:cNvPr id="15" name="Text 13"/>
+          <p:cNvSpPr/>
+          <p:nvPr/>
+        </p:nvSpPr>
+        <p:spPr>
+          <a:xfrm>
+            <a:off x="5779008" y="3090672"/>
+            <a:ext cx="5138928" cy="621792"/>
+          </a:xfrm>
+          <a:prstGeom prst="rect">
+            <a:avLst/>
+          </a:prstGeom>
+          <a:noFill/>
+          <a:ln/>
+        </p:spPr>
+        <p:txBody>
+          <a:bodyPr wrap="square" lIns="0" tIns="0" rIns="0" bIns="0" rtlCol="0" anchor="t">
+            <a:normAutofit/>
+          </a:bodyPr>
+          <a:lstStyle/>
+          <a:p>
+            <a:pPr indent="0" marL="0">
+              <a:buNone/>
+            </a:pPr>
+            <a:r>
+              <a:rPr lang="en-US" sz="1200" b="1" dirty="0">
                 <a:solidFill>
                   <a:srgbClr val="173747"/>
                 </a:solidFill>
@@ -3175,30 +3334,34 @@
                 <a:ea typeface="Aptos" pitchFamily="34" charset="-122"/>
                 <a:cs typeface="Aptos" pitchFamily="34" charset="-120"/>
               </a:rPr>
-              <a:t>$18,000</a:t>
-            </a:r>
-            <a:endParaRPr lang="en-US" sz="1000" dirty="0"/>
-          </a:p>
-        </p:txBody>
-      </p:sp>
-      <p:sp>
-        <p:nvSpPr>
-          <p:cNvPr id="12" name="Shape 10"/>
-          <p:cNvSpPr/>
-          <p:nvPr/>
-        </p:nvSpPr>
-        <p:spPr>
-          <a:xfrm>
-            <a:off x="914400" y="3273552"/>
-            <a:ext cx="3200400" cy="0"/>
-          </a:xfrm>
-          <a:prstGeom prst="line">
-            <a:avLst/>
-          </a:prstGeom>
-          <a:noFill/>
-          <a:ln w="8890">
+              <a:t>Does evidence lookup, review, or action follow-up improve on the current process?</a:t>
+            </a:r>
+            <a:endParaRPr lang="en-US" sz="1200" dirty="0"/>
+          </a:p>
+        </p:txBody>
+      </p:sp>
+      <p:sp>
+        <p:nvSpPr>
+          <p:cNvPr id="16" name="Shape 14"/>
+          <p:cNvSpPr/>
+          <p:nvPr/>
+        </p:nvSpPr>
+        <p:spPr>
+          <a:xfrm>
+            <a:off x="4498848" y="4078224"/>
+            <a:ext cx="6784848" cy="914400"/>
+          </a:xfrm>
+          <a:prstGeom prst="roundRect">
+            <a:avLst>
+              <a:gd name="adj" fmla="val 12000"/>
+            </a:avLst>
+          </a:prstGeom>
+          <a:solidFill>
+            <a:srgbClr val="FFFFFF"/>
+          </a:solidFill>
+          <a:ln w="11430">
             <a:solidFill>
-              <a:srgbClr val="E5EBEC"/>
+              <a:srgbClr val="DCE7E8"/>
             </a:solidFill>
             <a:prstDash val="solid"/>
           </a:ln>
@@ -3206,73 +3369,73 @@
       </p:sp>
       <p:sp>
         <p:nvSpPr>
-          <p:cNvPr id="13" name="Text 11"/>
-          <p:cNvSpPr/>
-          <p:nvPr/>
-        </p:nvSpPr>
-        <p:spPr>
-          <a:xfrm>
-            <a:off x="914400" y="3401568"/>
-            <a:ext cx="2148840" cy="246888"/>
-          </a:xfrm>
-          <a:prstGeom prst="rect">
-            <a:avLst/>
-          </a:prstGeom>
-          <a:noFill/>
-          <a:ln/>
-        </p:spPr>
-        <p:txBody>
-          <a:bodyPr wrap="square" lIns="0" tIns="0" rIns="0" bIns="0" rtlCol="0" anchor="ctr">
-            <a:normAutofit/>
-          </a:bodyPr>
-          <a:lstStyle/>
-          <a:p>
-            <a:pPr indent="0" marL="0">
-              <a:buNone/>
-            </a:pPr>
-            <a:r>
-              <a:rPr lang="en-US" sz="1000" dirty="0">
-                <a:solidFill>
-                  <a:srgbClr val="253E4D"/>
-                </a:solidFill>
-                <a:latin typeface="Aptos" pitchFamily="34" charset="0"/>
-                <a:ea typeface="Aptos" pitchFamily="34" charset="-122"/>
-                <a:cs typeface="Aptos" pitchFamily="34" charset="-120"/>
-              </a:rPr>
-              <a:t>Private deployment</a:t>
-            </a:r>
-            <a:endParaRPr lang="en-US" sz="1000" dirty="0"/>
-          </a:p>
-        </p:txBody>
-      </p:sp>
-      <p:sp>
-        <p:nvSpPr>
-          <p:cNvPr id="14" name="Text 12"/>
-          <p:cNvSpPr/>
-          <p:nvPr/>
-        </p:nvSpPr>
-        <p:spPr>
-          <a:xfrm>
-            <a:off x="3035808" y="3401568"/>
-            <a:ext cx="1097280" cy="246888"/>
-          </a:xfrm>
-          <a:prstGeom prst="rect">
-            <a:avLst/>
-          </a:prstGeom>
-          <a:noFill/>
-          <a:ln/>
-        </p:spPr>
-        <p:txBody>
-          <a:bodyPr wrap="square" lIns="0" tIns="0" rIns="0" bIns="0" rtlCol="0" anchor="ctr">
-            <a:normAutofit/>
-          </a:bodyPr>
-          <a:lstStyle/>
-          <a:p>
-            <a:pPr algn="r" indent="0" marL="0">
-              <a:buNone/>
-            </a:pPr>
-            <a:r>
-              <a:rPr lang="en-US" sz="1000" b="1" dirty="0">
+          <p:cNvPr id="17" name="Text 15"/>
+          <p:cNvSpPr/>
+          <p:nvPr/>
+        </p:nvSpPr>
+        <p:spPr>
+          <a:xfrm>
+            <a:off x="4736592" y="4233672"/>
+            <a:ext cx="1005840" cy="182880"/>
+          </a:xfrm>
+          <a:prstGeom prst="rect">
+            <a:avLst/>
+          </a:prstGeom>
+          <a:noFill/>
+          <a:ln/>
+        </p:spPr>
+        <p:txBody>
+          <a:bodyPr wrap="square" lIns="0" tIns="0" rIns="0" bIns="0" rtlCol="0" anchor="ctr">
+            <a:normAutofit/>
+          </a:bodyPr>
+          <a:lstStyle/>
+          <a:p>
+            <a:pPr indent="0" marL="0">
+              <a:buNone/>
+            </a:pPr>
+            <a:r>
+              <a:rPr lang="en-US" sz="850" b="1" spc="80" kern="0" dirty="0">
+                <a:solidFill>
+                  <a:srgbClr val="0D8F89"/>
+                </a:solidFill>
+                <a:latin typeface="Aptos" pitchFamily="34" charset="0"/>
+                <a:ea typeface="Aptos" pitchFamily="34" charset="-122"/>
+                <a:cs typeface="Aptos" pitchFamily="34" charset="-120"/>
+              </a:rPr>
+              <a:t>DELIVERY</a:t>
+            </a:r>
+            <a:endParaRPr lang="en-US" sz="850" dirty="0"/>
+          </a:p>
+        </p:txBody>
+      </p:sp>
+      <p:sp>
+        <p:nvSpPr>
+          <p:cNvPr id="18" name="Text 16"/>
+          <p:cNvSpPr/>
+          <p:nvPr/>
+        </p:nvSpPr>
+        <p:spPr>
+          <a:xfrm>
+            <a:off x="5779008" y="4206240"/>
+            <a:ext cx="5138928" cy="621792"/>
+          </a:xfrm>
+          <a:prstGeom prst="rect">
+            <a:avLst/>
+          </a:prstGeom>
+          <a:noFill/>
+          <a:ln/>
+        </p:spPr>
+        <p:txBody>
+          <a:bodyPr wrap="square" lIns="0" tIns="0" rIns="0" bIns="0" rtlCol="0" anchor="t">
+            <a:normAutofit/>
+          </a:bodyPr>
+          <a:lstStyle/>
+          <a:p>
+            <a:pPr indent="0" marL="0">
+              <a:buNone/>
+            </a:pPr>
+            <a:r>
+              <a:rPr lang="en-US" sz="1200" b="1" dirty="0">
                 <a:solidFill>
                   <a:srgbClr val="173747"/>
                 </a:solidFill>
@@ -3280,30 +3443,34 @@
                 <a:ea typeface="Aptos" pitchFamily="34" charset="-122"/>
                 <a:cs typeface="Aptos" pitchFamily="34" charset="-120"/>
               </a:rPr>
-              <a:t>$65,000 / year</a:t>
-            </a:r>
-            <a:endParaRPr lang="en-US" sz="1000" dirty="0"/>
-          </a:p>
-        </p:txBody>
-      </p:sp>
-      <p:sp>
-        <p:nvSpPr>
-          <p:cNvPr id="15" name="Shape 13"/>
-          <p:cNvSpPr/>
-          <p:nvPr/>
-        </p:nvSpPr>
-        <p:spPr>
-          <a:xfrm>
-            <a:off x="914400" y="3785616"/>
-            <a:ext cx="3200400" cy="0"/>
-          </a:xfrm>
-          <a:prstGeom prst="line">
-            <a:avLst/>
-          </a:prstGeom>
-          <a:noFill/>
-          <a:ln w="8890">
+              <a:t>What setup, security, support, and evidence-handling work does each exercise require?</a:t>
+            </a:r>
+            <a:endParaRPr lang="en-US" sz="1200" dirty="0"/>
+          </a:p>
+        </p:txBody>
+      </p:sp>
+      <p:sp>
+        <p:nvSpPr>
+          <p:cNvPr id="19" name="Shape 17"/>
+          <p:cNvSpPr/>
+          <p:nvPr/>
+        </p:nvSpPr>
+        <p:spPr>
+          <a:xfrm>
+            <a:off x="4498848" y="5321808"/>
+            <a:ext cx="6784848" cy="603504"/>
+          </a:xfrm>
+          <a:prstGeom prst="roundRect">
+            <a:avLst>
+              <a:gd name="adj" fmla="val 18182"/>
+            </a:avLst>
+          </a:prstGeom>
+          <a:solidFill>
+            <a:srgbClr val="FFF4E2"/>
+          </a:solidFill>
+          <a:ln w="11430">
             <a:solidFill>
-              <a:srgbClr val="E5EBEC"/>
+              <a:srgbClr val="EBD9B9"/>
             </a:solidFill>
             <a:prstDash val="solid"/>
           </a:ln>
@@ -3311,1035 +3478,42 @@
       </p:sp>
       <p:sp>
         <p:nvSpPr>
-          <p:cNvPr id="16" name="Text 14"/>
-          <p:cNvSpPr/>
-          <p:nvPr/>
-        </p:nvSpPr>
-        <p:spPr>
-          <a:xfrm>
-            <a:off x="914400" y="3913632"/>
-            <a:ext cx="2148840" cy="246888"/>
-          </a:xfrm>
-          <a:prstGeom prst="rect">
-            <a:avLst/>
-          </a:prstGeom>
-          <a:noFill/>
-          <a:ln/>
-        </p:spPr>
-        <p:txBody>
-          <a:bodyPr wrap="square" lIns="0" tIns="0" rIns="0" bIns="0" rtlCol="0" anchor="ctr">
-            <a:normAutofit/>
-          </a:bodyPr>
-          <a:lstStyle/>
-          <a:p>
-            <a:pPr indent="0" marL="0">
-              <a:buNone/>
-            </a:pPr>
-            <a:r>
-              <a:rPr lang="en-US" sz="1000" dirty="0">
-                <a:solidFill>
-                  <a:srgbClr val="253E4D"/>
-                </a:solidFill>
-                <a:latin typeface="Aptos" pitchFamily="34" charset="0"/>
-                <a:ea typeface="Aptos" pitchFamily="34" charset="-122"/>
-                <a:cs typeface="Aptos" pitchFamily="34" charset="-120"/>
-              </a:rPr>
-              <a:t>Custom template</a:t>
-            </a:r>
-            <a:endParaRPr lang="en-US" sz="1000" dirty="0"/>
-          </a:p>
-        </p:txBody>
-      </p:sp>
-      <p:sp>
-        <p:nvSpPr>
-          <p:cNvPr id="17" name="Text 15"/>
-          <p:cNvSpPr/>
-          <p:nvPr/>
-        </p:nvSpPr>
-        <p:spPr>
-          <a:xfrm>
-            <a:off x="3035808" y="3913632"/>
-            <a:ext cx="1097280" cy="246888"/>
-          </a:xfrm>
-          <a:prstGeom prst="rect">
-            <a:avLst/>
-          </a:prstGeom>
-          <a:noFill/>
-          <a:ln/>
-        </p:spPr>
-        <p:txBody>
-          <a:bodyPr wrap="square" lIns="0" tIns="0" rIns="0" bIns="0" rtlCol="0" anchor="ctr">
-            <a:normAutofit/>
-          </a:bodyPr>
-          <a:lstStyle/>
-          <a:p>
-            <a:pPr algn="r" indent="0" marL="0">
-              <a:buNone/>
-            </a:pPr>
-            <a:r>
-              <a:rPr lang="en-US" sz="1000" b="1" dirty="0">
-                <a:solidFill>
-                  <a:srgbClr val="173747"/>
-                </a:solidFill>
-                <a:latin typeface="Aptos" pitchFamily="34" charset="0"/>
-                <a:ea typeface="Aptos" pitchFamily="34" charset="-122"/>
-                <a:cs typeface="Aptos" pitchFamily="34" charset="-120"/>
-              </a:rPr>
-              <a:t>$6,000</a:t>
-            </a:r>
-            <a:endParaRPr lang="en-US" sz="1000" dirty="0"/>
-          </a:p>
-        </p:txBody>
-      </p:sp>
-      <p:sp>
-        <p:nvSpPr>
-          <p:cNvPr id="18" name="Shape 16"/>
-          <p:cNvSpPr/>
-          <p:nvPr/>
-        </p:nvSpPr>
-        <p:spPr>
-          <a:xfrm>
-            <a:off x="914400" y="4297680"/>
-            <a:ext cx="3200400" cy="0"/>
-          </a:xfrm>
-          <a:prstGeom prst="line">
-            <a:avLst/>
-          </a:prstGeom>
-          <a:noFill/>
-          <a:ln w="8890">
-            <a:solidFill>
-              <a:srgbClr val="E5EBEC"/>
-            </a:solidFill>
-            <a:prstDash val="solid"/>
-          </a:ln>
-        </p:spPr>
-      </p:sp>
-      <p:sp>
-        <p:nvSpPr>
-          <p:cNvPr id="19" name="Text 17"/>
-          <p:cNvSpPr/>
-          <p:nvPr/>
-        </p:nvSpPr>
-        <p:spPr>
-          <a:xfrm>
-            <a:off x="914400" y="4425696"/>
-            <a:ext cx="2148840" cy="246888"/>
-          </a:xfrm>
-          <a:prstGeom prst="rect">
-            <a:avLst/>
-          </a:prstGeom>
-          <a:noFill/>
-          <a:ln/>
-        </p:spPr>
-        <p:txBody>
-          <a:bodyPr wrap="square" lIns="0" tIns="0" rIns="0" bIns="0" rtlCol="0" anchor="ctr">
-            <a:normAutofit/>
-          </a:bodyPr>
-          <a:lstStyle/>
-          <a:p>
-            <a:pPr indent="0" marL="0">
-              <a:buNone/>
-            </a:pPr>
-            <a:r>
-              <a:rPr lang="en-US" sz="1000" dirty="0">
-                <a:solidFill>
-                  <a:srgbClr val="253E4D"/>
-                </a:solidFill>
-                <a:latin typeface="Aptos" pitchFamily="34" charset="0"/>
-                <a:ea typeface="Aptos" pitchFamily="34" charset="-122"/>
-                <a:cs typeface="Aptos" pitchFamily="34" charset="-120"/>
-              </a:rPr>
-              <a:t>Support services</a:t>
-            </a:r>
-            <a:endParaRPr lang="en-US" sz="1000" dirty="0"/>
-          </a:p>
-        </p:txBody>
-      </p:sp>
-      <p:sp>
-        <p:nvSpPr>
           <p:cNvPr id="20" name="Text 18"/>
           <p:cNvSpPr/>
           <p:nvPr/>
         </p:nvSpPr>
         <p:spPr>
           <a:xfrm>
-            <a:off x="3035808" y="4425696"/>
-            <a:ext cx="1097280" cy="246888"/>
-          </a:xfrm>
-          <a:prstGeom prst="rect">
-            <a:avLst/>
-          </a:prstGeom>
-          <a:noFill/>
-          <a:ln/>
-        </p:spPr>
-        <p:txBody>
-          <a:bodyPr wrap="square" lIns="0" tIns="0" rIns="0" bIns="0" rtlCol="0" anchor="ctr">
-            <a:normAutofit/>
-          </a:bodyPr>
-          <a:lstStyle/>
-          <a:p>
-            <a:pPr algn="r" indent="0" marL="0">
-              <a:buNone/>
-            </a:pPr>
-            <a:r>
-              <a:rPr lang="en-US" sz="1000" b="1" dirty="0">
-                <a:solidFill>
-                  <a:srgbClr val="173747"/>
-                </a:solidFill>
-                <a:latin typeface="Aptos" pitchFamily="34" charset="0"/>
-                <a:ea typeface="Aptos" pitchFamily="34" charset="-122"/>
-                <a:cs typeface="Aptos" pitchFamily="34" charset="-120"/>
-              </a:rPr>
-              <a:t>$1,500 / day</a:t>
-            </a:r>
-            <a:endParaRPr lang="en-US" sz="1000" dirty="0"/>
-          </a:p>
-        </p:txBody>
-      </p:sp>
-      <p:sp>
-        <p:nvSpPr>
-          <p:cNvPr id="21" name="Text 19"/>
-          <p:cNvSpPr/>
-          <p:nvPr/>
-        </p:nvSpPr>
-        <p:spPr>
-          <a:xfrm>
-            <a:off x="4864608" y="1810512"/>
-            <a:ext cx="5303520" cy="265176"/>
-          </a:xfrm>
-          <a:prstGeom prst="rect">
-            <a:avLst/>
-          </a:prstGeom>
-          <a:noFill/>
-          <a:ln/>
-        </p:spPr>
-        <p:txBody>
-          <a:bodyPr wrap="square" lIns="0" tIns="0" rIns="0" bIns="0" rtlCol="0" anchor="ctr">
-            <a:normAutofit/>
-          </a:bodyPr>
-          <a:lstStyle/>
-          <a:p>
-            <a:pPr indent="0" marL="0">
-              <a:buNone/>
-            </a:pPr>
-            <a:r>
-              <a:rPr lang="en-US" sz="1400" b="1" dirty="0">
-                <a:solidFill>
-                  <a:srgbClr val="173747"/>
-                </a:solidFill>
-                <a:latin typeface="Aptos" pitchFamily="34" charset="0"/>
-                <a:ea typeface="Aptos" pitchFamily="34" charset="-122"/>
-                <a:cs typeface="Aptos" pitchFamily="34" charset="-120"/>
-              </a:rPr>
-              <a:t>Simple annual scenarios</a:t>
-            </a:r>
-            <a:endParaRPr lang="en-US" sz="1400" dirty="0"/>
-          </a:p>
-        </p:txBody>
-      </p:sp>
-      <p:sp>
-        <p:nvSpPr>
-          <p:cNvPr id="22" name="Text 20"/>
-          <p:cNvSpPr/>
-          <p:nvPr/>
-        </p:nvSpPr>
-        <p:spPr>
-          <a:xfrm>
-            <a:off x="4901184" y="2267712"/>
-            <a:ext cx="1325880" cy="182880"/>
-          </a:xfrm>
-          <a:prstGeom prst="rect">
-            <a:avLst/>
-          </a:prstGeom>
-          <a:noFill/>
-          <a:ln/>
-        </p:spPr>
-        <p:txBody>
-          <a:bodyPr wrap="square" lIns="0" tIns="0" rIns="0" bIns="0" rtlCol="0" anchor="ctr">
-            <a:normAutofit/>
-          </a:bodyPr>
-          <a:lstStyle/>
-          <a:p>
-            <a:pPr indent="0" marL="0">
-              <a:buNone/>
-            </a:pPr>
-            <a:r>
-              <a:rPr lang="en-US" sz="800" b="1" dirty="0">
-                <a:solidFill>
-                  <a:srgbClr val="0D8F89"/>
-                </a:solidFill>
-                <a:latin typeface="Aptos" pitchFamily="34" charset="0"/>
-                <a:ea typeface="Aptos" pitchFamily="34" charset="-122"/>
-                <a:cs typeface="Aptos" pitchFamily="34" charset="-120"/>
-              </a:rPr>
-              <a:t>SCENARIO</a:t>
-            </a:r>
-            <a:endParaRPr lang="en-US" sz="800" dirty="0"/>
-          </a:p>
-        </p:txBody>
-      </p:sp>
-      <p:sp>
-        <p:nvSpPr>
-          <p:cNvPr id="23" name="Text 21"/>
-          <p:cNvSpPr/>
-          <p:nvPr/>
-        </p:nvSpPr>
-        <p:spPr>
-          <a:xfrm>
-            <a:off x="6236208" y="2267712"/>
-            <a:ext cx="1234440" cy="256032"/>
-          </a:xfrm>
-          <a:prstGeom prst="rect">
-            <a:avLst/>
-          </a:prstGeom>
-          <a:noFill/>
-          <a:ln/>
-        </p:spPr>
-        <p:txBody>
-          <a:bodyPr wrap="square" lIns="0" tIns="0" rIns="0" bIns="0" rtlCol="0" anchor="ctr">
-            <a:normAutofit/>
-          </a:bodyPr>
-          <a:lstStyle/>
-          <a:p>
-            <a:pPr algn="r" indent="0" marL="0">
-              <a:buNone/>
-            </a:pPr>
-            <a:r>
-              <a:rPr lang="en-US" sz="800" b="1" dirty="0">
-                <a:solidFill>
-                  <a:srgbClr val="0D8F89"/>
-                </a:solidFill>
-                <a:latin typeface="Aptos" pitchFamily="34" charset="0"/>
-                <a:ea typeface="Aptos" pitchFamily="34" charset="-122"/>
-                <a:cs typeface="Aptos" pitchFamily="34" charset="-120"/>
-              </a:rPr>
-              <a:t>Revenue</a:t>
-            </a:r>
-            <a:endParaRPr lang="en-US" sz="800" dirty="0"/>
-          </a:p>
-        </p:txBody>
-      </p:sp>
-      <p:sp>
-        <p:nvSpPr>
-          <p:cNvPr id="24" name="Text 22"/>
-          <p:cNvSpPr/>
-          <p:nvPr/>
-        </p:nvSpPr>
-        <p:spPr>
-          <a:xfrm>
-            <a:off x="7726680" y="2267712"/>
-            <a:ext cx="1143000" cy="256032"/>
-          </a:xfrm>
-          <a:prstGeom prst="rect">
-            <a:avLst/>
-          </a:prstGeom>
-          <a:noFill/>
-          <a:ln/>
-        </p:spPr>
-        <p:txBody>
-          <a:bodyPr wrap="square" lIns="0" tIns="0" rIns="0" bIns="0" rtlCol="0" anchor="ctr">
-            <a:normAutofit/>
-          </a:bodyPr>
-          <a:lstStyle/>
-          <a:p>
-            <a:pPr algn="r" indent="0" marL="0">
-              <a:buNone/>
-            </a:pPr>
-            <a:r>
-              <a:rPr lang="en-US" sz="800" b="1" dirty="0">
-                <a:solidFill>
-                  <a:srgbClr val="0D8F89"/>
-                </a:solidFill>
-                <a:latin typeface="Aptos" pitchFamily="34" charset="0"/>
-                <a:ea typeface="Aptos" pitchFamily="34" charset="-122"/>
-                <a:cs typeface="Aptos" pitchFamily="34" charset="-120"/>
-              </a:rPr>
-              <a:t>Costs*</a:t>
-            </a:r>
-            <a:endParaRPr lang="en-US" sz="800" dirty="0"/>
-          </a:p>
-        </p:txBody>
-      </p:sp>
-      <p:sp>
-        <p:nvSpPr>
-          <p:cNvPr id="25" name="Text 23"/>
-          <p:cNvSpPr/>
-          <p:nvPr/>
-        </p:nvSpPr>
-        <p:spPr>
-          <a:xfrm>
-            <a:off x="9162288" y="2267712"/>
-            <a:ext cx="1600200" cy="256032"/>
-          </a:xfrm>
-          <a:prstGeom prst="rect">
-            <a:avLst/>
-          </a:prstGeom>
-          <a:noFill/>
-          <a:ln/>
-        </p:spPr>
-        <p:txBody>
-          <a:bodyPr wrap="square" lIns="0" tIns="0" rIns="0" bIns="0" rtlCol="0" anchor="ctr">
-            <a:normAutofit/>
-          </a:bodyPr>
-          <a:lstStyle/>
-          <a:p>
-            <a:pPr algn="r" indent="0" marL="0">
-              <a:buNone/>
-            </a:pPr>
-            <a:r>
-              <a:rPr lang="en-US" sz="800" b="1" dirty="0">
-                <a:solidFill>
-                  <a:srgbClr val="0D8F89"/>
-                </a:solidFill>
-                <a:latin typeface="Aptos" pitchFamily="34" charset="0"/>
-                <a:ea typeface="Aptos" pitchFamily="34" charset="-122"/>
-                <a:cs typeface="Aptos" pitchFamily="34" charset="-120"/>
-              </a:rPr>
-              <a:t>After costs*</a:t>
-            </a:r>
-            <a:endParaRPr lang="en-US" sz="800" dirty="0"/>
-          </a:p>
-        </p:txBody>
-      </p:sp>
-      <p:sp>
-        <p:nvSpPr>
-          <p:cNvPr id="26" name="Text 24"/>
-          <p:cNvSpPr/>
-          <p:nvPr/>
-        </p:nvSpPr>
-        <p:spPr>
-          <a:xfrm>
-            <a:off x="4901184" y="2843784"/>
-            <a:ext cx="1325880" cy="256032"/>
-          </a:xfrm>
-          <a:prstGeom prst="rect">
-            <a:avLst/>
-          </a:prstGeom>
-          <a:noFill/>
-          <a:ln/>
-        </p:spPr>
-        <p:txBody>
-          <a:bodyPr wrap="square" lIns="0" tIns="0" rIns="0" bIns="0" rtlCol="0" anchor="ctr">
-            <a:normAutofit/>
-          </a:bodyPr>
-          <a:lstStyle/>
-          <a:p>
-            <a:pPr indent="0" marL="0">
-              <a:buNone/>
-            </a:pPr>
-            <a:r>
-              <a:rPr lang="en-US" sz="950" dirty="0">
-                <a:solidFill>
-                  <a:srgbClr val="253E4D"/>
-                </a:solidFill>
-                <a:latin typeface="Aptos" pitchFamily="34" charset="0"/>
-                <a:ea typeface="Aptos" pitchFamily="34" charset="-122"/>
-                <a:cs typeface="Aptos" pitchFamily="34" charset="-120"/>
-              </a:rPr>
-              <a:t>Conservative</a:t>
-            </a:r>
-            <a:endParaRPr lang="en-US" sz="950" dirty="0"/>
-          </a:p>
-        </p:txBody>
-      </p:sp>
-      <p:sp>
-        <p:nvSpPr>
-          <p:cNvPr id="27" name="Text 25"/>
-          <p:cNvSpPr/>
-          <p:nvPr/>
-        </p:nvSpPr>
-        <p:spPr>
-          <a:xfrm>
-            <a:off x="6236208" y="2843784"/>
-            <a:ext cx="1234440" cy="256032"/>
-          </a:xfrm>
-          <a:prstGeom prst="rect">
-            <a:avLst/>
-          </a:prstGeom>
-          <a:noFill/>
-          <a:ln/>
-        </p:spPr>
-        <p:txBody>
-          <a:bodyPr wrap="square" lIns="0" tIns="0" rIns="0" bIns="0" rtlCol="0" anchor="ctr">
-            <a:normAutofit/>
-          </a:bodyPr>
-          <a:lstStyle/>
-          <a:p>
-            <a:pPr algn="r" indent="0" marL="0">
-              <a:buNone/>
-            </a:pPr>
-            <a:r>
-              <a:rPr lang="en-US" sz="1000" dirty="0">
-                <a:solidFill>
-                  <a:srgbClr val="173747"/>
-                </a:solidFill>
-                <a:latin typeface="Aptos" pitchFamily="34" charset="0"/>
-                <a:ea typeface="Aptos" pitchFamily="34" charset="-122"/>
-                <a:cs typeface="Aptos" pitchFamily="34" charset="-120"/>
-              </a:rPr>
-              <a:t>$177k</a:t>
-            </a:r>
-            <a:endParaRPr lang="en-US" sz="1000" dirty="0"/>
-          </a:p>
-        </p:txBody>
-      </p:sp>
-      <p:sp>
-        <p:nvSpPr>
-          <p:cNvPr id="28" name="Text 26"/>
-          <p:cNvSpPr/>
-          <p:nvPr/>
-        </p:nvSpPr>
-        <p:spPr>
-          <a:xfrm>
-            <a:off x="7726680" y="2843784"/>
-            <a:ext cx="1143000" cy="256032"/>
-          </a:xfrm>
-          <a:prstGeom prst="rect">
-            <a:avLst/>
-          </a:prstGeom>
-          <a:noFill/>
-          <a:ln/>
-        </p:spPr>
-        <p:txBody>
-          <a:bodyPr wrap="square" lIns="0" tIns="0" rIns="0" bIns="0" rtlCol="0" anchor="ctr">
-            <a:normAutofit/>
-          </a:bodyPr>
-          <a:lstStyle/>
-          <a:p>
-            <a:pPr algn="r" indent="0" marL="0">
-              <a:buNone/>
-            </a:pPr>
-            <a:r>
-              <a:rPr lang="en-US" sz="1000" dirty="0">
-                <a:solidFill>
-                  <a:srgbClr val="253E4D"/>
-                </a:solidFill>
-                <a:latin typeface="Aptos" pitchFamily="34" charset="0"/>
-                <a:ea typeface="Aptos" pitchFamily="34" charset="-122"/>
-                <a:cs typeface="Aptos" pitchFamily="34" charset="-120"/>
-              </a:rPr>
-              <a:t>$385k</a:t>
-            </a:r>
-            <a:endParaRPr lang="en-US" sz="1000" dirty="0"/>
-          </a:p>
-        </p:txBody>
-      </p:sp>
-      <p:sp>
-        <p:nvSpPr>
-          <p:cNvPr id="29" name="Text 27"/>
-          <p:cNvSpPr/>
-          <p:nvPr/>
-        </p:nvSpPr>
-        <p:spPr>
-          <a:xfrm>
-            <a:off x="9162288" y="2843784"/>
-            <a:ext cx="1600200" cy="256032"/>
-          </a:xfrm>
-          <a:prstGeom prst="rect">
-            <a:avLst/>
-          </a:prstGeom>
-          <a:noFill/>
-          <a:ln/>
-        </p:spPr>
-        <p:txBody>
-          <a:bodyPr wrap="square" lIns="0" tIns="0" rIns="0" bIns="0" rtlCol="0" anchor="ctr">
-            <a:normAutofit/>
-          </a:bodyPr>
-          <a:lstStyle/>
-          <a:p>
-            <a:pPr algn="r" indent="0" marL="0">
-              <a:buNone/>
-            </a:pPr>
-            <a:r>
-              <a:rPr lang="en-US" sz="1000" b="1" dirty="0">
-                <a:solidFill>
-                  <a:srgbClr val="B85A53"/>
-                </a:solidFill>
-                <a:latin typeface="Aptos" pitchFamily="34" charset="0"/>
-                <a:ea typeface="Aptos" pitchFamily="34" charset="-122"/>
-                <a:cs typeface="Aptos" pitchFamily="34" charset="-120"/>
-              </a:rPr>
-              <a:t>−$208k</a:t>
-            </a:r>
-            <a:endParaRPr lang="en-US" sz="1000" dirty="0"/>
-          </a:p>
-        </p:txBody>
-      </p:sp>
-      <p:sp>
-        <p:nvSpPr>
-          <p:cNvPr id="30" name="Text 28"/>
-          <p:cNvSpPr/>
-          <p:nvPr/>
-        </p:nvSpPr>
-        <p:spPr>
-          <a:xfrm>
-            <a:off x="4901184" y="3419856"/>
-            <a:ext cx="1325880" cy="256032"/>
-          </a:xfrm>
-          <a:prstGeom prst="rect">
-            <a:avLst/>
-          </a:prstGeom>
-          <a:noFill/>
-          <a:ln/>
-        </p:spPr>
-        <p:txBody>
-          <a:bodyPr wrap="square" lIns="0" tIns="0" rIns="0" bIns="0" rtlCol="0" anchor="ctr">
-            <a:normAutofit/>
-          </a:bodyPr>
-          <a:lstStyle/>
-          <a:p>
-            <a:pPr indent="0" marL="0">
-              <a:buNone/>
-            </a:pPr>
-            <a:r>
-              <a:rPr lang="en-US" sz="950" dirty="0">
-                <a:solidFill>
-                  <a:srgbClr val="253E4D"/>
-                </a:solidFill>
-                <a:latin typeface="Aptos" pitchFamily="34" charset="0"/>
-                <a:ea typeface="Aptos" pitchFamily="34" charset="-122"/>
-                <a:cs typeface="Aptos" pitchFamily="34" charset="-120"/>
-              </a:rPr>
-              <a:t>Base</a:t>
-            </a:r>
-            <a:endParaRPr lang="en-US" sz="950" dirty="0"/>
-          </a:p>
-        </p:txBody>
-      </p:sp>
-      <p:sp>
-        <p:nvSpPr>
-          <p:cNvPr id="31" name="Text 29"/>
-          <p:cNvSpPr/>
-          <p:nvPr/>
-        </p:nvSpPr>
-        <p:spPr>
-          <a:xfrm>
-            <a:off x="6236208" y="3419856"/>
-            <a:ext cx="1234440" cy="256032"/>
-          </a:xfrm>
-          <a:prstGeom prst="rect">
-            <a:avLst/>
-          </a:prstGeom>
-          <a:noFill/>
-          <a:ln/>
-        </p:spPr>
-        <p:txBody>
-          <a:bodyPr wrap="square" lIns="0" tIns="0" rIns="0" bIns="0" rtlCol="0" anchor="ctr">
-            <a:normAutofit/>
-          </a:bodyPr>
-          <a:lstStyle/>
-          <a:p>
-            <a:pPr algn="r" indent="0" marL="0">
-              <a:buNone/>
-            </a:pPr>
-            <a:r>
-              <a:rPr lang="en-US" sz="1000" dirty="0">
-                <a:solidFill>
-                  <a:srgbClr val="173747"/>
-                </a:solidFill>
-                <a:latin typeface="Aptos" pitchFamily="34" charset="0"/>
-                <a:ea typeface="Aptos" pitchFamily="34" charset="-122"/>
-                <a:cs typeface="Aptos" pitchFamily="34" charset="-120"/>
-              </a:rPr>
-              <a:t>$488k</a:t>
-            </a:r>
-            <a:endParaRPr lang="en-US" sz="1000" dirty="0"/>
-          </a:p>
-        </p:txBody>
-      </p:sp>
-      <p:sp>
-        <p:nvSpPr>
-          <p:cNvPr id="32" name="Text 30"/>
-          <p:cNvSpPr/>
-          <p:nvPr/>
-        </p:nvSpPr>
-        <p:spPr>
-          <a:xfrm>
-            <a:off x="7726680" y="3419856"/>
-            <a:ext cx="1143000" cy="256032"/>
-          </a:xfrm>
-          <a:prstGeom prst="rect">
-            <a:avLst/>
-          </a:prstGeom>
-          <a:noFill/>
-          <a:ln/>
-        </p:spPr>
-        <p:txBody>
-          <a:bodyPr wrap="square" lIns="0" tIns="0" rIns="0" bIns="0" rtlCol="0" anchor="ctr">
-            <a:normAutofit/>
-          </a:bodyPr>
-          <a:lstStyle/>
-          <a:p>
-            <a:pPr algn="r" indent="0" marL="0">
-              <a:buNone/>
-            </a:pPr>
-            <a:r>
-              <a:rPr lang="en-US" sz="1000" dirty="0">
-                <a:solidFill>
-                  <a:srgbClr val="253E4D"/>
-                </a:solidFill>
-                <a:latin typeface="Aptos" pitchFamily="34" charset="0"/>
-                <a:ea typeface="Aptos" pitchFamily="34" charset="-122"/>
-                <a:cs typeface="Aptos" pitchFamily="34" charset="-120"/>
-              </a:rPr>
-              <a:t>$645k</a:t>
-            </a:r>
-            <a:endParaRPr lang="en-US" sz="1000" dirty="0"/>
-          </a:p>
-        </p:txBody>
-      </p:sp>
-      <p:sp>
-        <p:nvSpPr>
-          <p:cNvPr id="33" name="Text 31"/>
-          <p:cNvSpPr/>
-          <p:nvPr/>
-        </p:nvSpPr>
-        <p:spPr>
-          <a:xfrm>
-            <a:off x="9162288" y="3419856"/>
-            <a:ext cx="1600200" cy="256032"/>
-          </a:xfrm>
-          <a:prstGeom prst="rect">
-            <a:avLst/>
-          </a:prstGeom>
-          <a:noFill/>
-          <a:ln/>
-        </p:spPr>
-        <p:txBody>
-          <a:bodyPr wrap="square" lIns="0" tIns="0" rIns="0" bIns="0" rtlCol="0" anchor="ctr">
-            <a:normAutofit/>
-          </a:bodyPr>
-          <a:lstStyle/>
-          <a:p>
-            <a:pPr algn="r" indent="0" marL="0">
-              <a:buNone/>
-            </a:pPr>
-            <a:r>
-              <a:rPr lang="en-US" sz="1000" b="1" dirty="0">
-                <a:solidFill>
-                  <a:srgbClr val="B85A53"/>
-                </a:solidFill>
-                <a:latin typeface="Aptos" pitchFamily="34" charset="0"/>
-                <a:ea typeface="Aptos" pitchFamily="34" charset="-122"/>
-                <a:cs typeface="Aptos" pitchFamily="34" charset="-120"/>
-              </a:rPr>
-              <a:t>−$157k</a:t>
-            </a:r>
-            <a:endParaRPr lang="en-US" sz="1000" dirty="0"/>
-          </a:p>
-        </p:txBody>
-      </p:sp>
-      <p:sp>
-        <p:nvSpPr>
-          <p:cNvPr id="34" name="Text 32"/>
-          <p:cNvSpPr/>
-          <p:nvPr/>
-        </p:nvSpPr>
-        <p:spPr>
-          <a:xfrm>
-            <a:off x="4901184" y="3995928"/>
-            <a:ext cx="1325880" cy="256032"/>
-          </a:xfrm>
-          <a:prstGeom prst="rect">
-            <a:avLst/>
-          </a:prstGeom>
-          <a:noFill/>
-          <a:ln/>
-        </p:spPr>
-        <p:txBody>
-          <a:bodyPr wrap="square" lIns="0" tIns="0" rIns="0" bIns="0" rtlCol="0" anchor="ctr">
-            <a:normAutofit/>
-          </a:bodyPr>
-          <a:lstStyle/>
-          <a:p>
-            <a:pPr indent="0" marL="0">
-              <a:buNone/>
-            </a:pPr>
-            <a:r>
-              <a:rPr lang="en-US" sz="950" b="1" dirty="0">
-                <a:solidFill>
-                  <a:srgbClr val="253E4D"/>
-                </a:solidFill>
-                <a:latin typeface="Aptos" pitchFamily="34" charset="0"/>
-                <a:ea typeface="Aptos" pitchFamily="34" charset="-122"/>
-                <a:cs typeface="Aptos" pitchFamily="34" charset="-120"/>
-              </a:rPr>
-              <a:t>High scale</a:t>
-            </a:r>
-            <a:endParaRPr lang="en-US" sz="950" dirty="0"/>
-          </a:p>
-        </p:txBody>
-      </p:sp>
-      <p:sp>
-        <p:nvSpPr>
-          <p:cNvPr id="35" name="Text 33"/>
-          <p:cNvSpPr/>
-          <p:nvPr/>
-        </p:nvSpPr>
-        <p:spPr>
-          <a:xfrm>
-            <a:off x="6236208" y="3995928"/>
-            <a:ext cx="1234440" cy="256032"/>
-          </a:xfrm>
-          <a:prstGeom prst="rect">
-            <a:avLst/>
-          </a:prstGeom>
-          <a:noFill/>
-          <a:ln/>
-        </p:spPr>
-        <p:txBody>
-          <a:bodyPr wrap="square" lIns="0" tIns="0" rIns="0" bIns="0" rtlCol="0" anchor="ctr">
-            <a:normAutofit/>
-          </a:bodyPr>
-          <a:lstStyle/>
-          <a:p>
-            <a:pPr algn="r" indent="0" marL="0">
-              <a:buNone/>
-            </a:pPr>
-            <a:r>
-              <a:rPr lang="en-US" sz="1000" b="1" dirty="0">
-                <a:solidFill>
-                  <a:srgbClr val="173747"/>
-                </a:solidFill>
-                <a:latin typeface="Aptos" pitchFamily="34" charset="0"/>
-                <a:ea typeface="Aptos" pitchFamily="34" charset="-122"/>
-                <a:cs typeface="Aptos" pitchFamily="34" charset="-120"/>
-              </a:rPr>
-              <a:t>$2.05m</a:t>
-            </a:r>
-            <a:endParaRPr lang="en-US" sz="1000" dirty="0"/>
-          </a:p>
-        </p:txBody>
-      </p:sp>
-      <p:sp>
-        <p:nvSpPr>
-          <p:cNvPr id="36" name="Text 34"/>
-          <p:cNvSpPr/>
-          <p:nvPr/>
-        </p:nvSpPr>
-        <p:spPr>
-          <a:xfrm>
-            <a:off x="7726680" y="3995928"/>
-            <a:ext cx="1143000" cy="256032"/>
-          </a:xfrm>
-          <a:prstGeom prst="rect">
-            <a:avLst/>
-          </a:prstGeom>
-          <a:noFill/>
-          <a:ln/>
-        </p:spPr>
-        <p:txBody>
-          <a:bodyPr wrap="square" lIns="0" tIns="0" rIns="0" bIns="0" rtlCol="0" anchor="ctr">
-            <a:normAutofit/>
-          </a:bodyPr>
-          <a:lstStyle/>
-          <a:p>
-            <a:pPr algn="r" indent="0" marL="0">
-              <a:buNone/>
-            </a:pPr>
-            <a:r>
-              <a:rPr lang="en-US" sz="1000" dirty="0">
-                <a:solidFill>
-                  <a:srgbClr val="253E4D"/>
-                </a:solidFill>
-                <a:latin typeface="Aptos" pitchFamily="34" charset="0"/>
-                <a:ea typeface="Aptos" pitchFamily="34" charset="-122"/>
-                <a:cs typeface="Aptos" pitchFamily="34" charset="-120"/>
-              </a:rPr>
-              <a:t>$1.87m</a:t>
-            </a:r>
-            <a:endParaRPr lang="en-US" sz="1000" dirty="0"/>
-          </a:p>
-        </p:txBody>
-      </p:sp>
-      <p:sp>
-        <p:nvSpPr>
-          <p:cNvPr id="37" name="Text 35"/>
-          <p:cNvSpPr/>
-          <p:nvPr/>
-        </p:nvSpPr>
-        <p:spPr>
-          <a:xfrm>
-            <a:off x="9162288" y="3995928"/>
-            <a:ext cx="1600200" cy="256032"/>
-          </a:xfrm>
-          <a:prstGeom prst="rect">
-            <a:avLst/>
-          </a:prstGeom>
-          <a:noFill/>
-          <a:ln/>
-        </p:spPr>
-        <p:txBody>
-          <a:bodyPr wrap="square" lIns="0" tIns="0" rIns="0" bIns="0" rtlCol="0" anchor="ctr">
-            <a:normAutofit/>
-          </a:bodyPr>
-          <a:lstStyle/>
-          <a:p>
-            <a:pPr algn="r" indent="0" marL="0">
-              <a:buNone/>
-            </a:pPr>
-            <a:r>
-              <a:rPr lang="en-US" sz="1000" b="1" dirty="0">
-                <a:solidFill>
-                  <a:srgbClr val="368576"/>
-                </a:solidFill>
-                <a:latin typeface="Aptos" pitchFamily="34" charset="0"/>
-                <a:ea typeface="Aptos" pitchFamily="34" charset="-122"/>
-                <a:cs typeface="Aptos" pitchFamily="34" charset="-120"/>
-              </a:rPr>
-              <a:t>+$180k</a:t>
-            </a:r>
-            <a:endParaRPr lang="en-US" sz="1000" dirty="0"/>
-          </a:p>
-        </p:txBody>
-      </p:sp>
-      <p:sp>
-        <p:nvSpPr>
-          <p:cNvPr id="38" name="Text 36"/>
-          <p:cNvSpPr/>
-          <p:nvPr/>
-        </p:nvSpPr>
-        <p:spPr>
-          <a:xfrm>
-            <a:off x="4892040" y="4681728"/>
-            <a:ext cx="5852160" cy="384048"/>
-          </a:xfrm>
-          <a:prstGeom prst="rect">
-            <a:avLst/>
-          </a:prstGeom>
-          <a:noFill/>
-          <a:ln/>
-        </p:spPr>
-        <p:txBody>
-          <a:bodyPr wrap="square" lIns="0" tIns="0" rIns="0" bIns="0" rtlCol="0" anchor="t">
-            <a:normAutofit/>
-          </a:bodyPr>
-          <a:lstStyle/>
-          <a:p>
-            <a:pPr indent="0" marL="0">
-              <a:buNone/>
-            </a:pPr>
-            <a:r>
-              <a:rPr lang="en-US" sz="850" dirty="0">
-                <a:solidFill>
-                  <a:srgbClr val="6C808B"/>
-                </a:solidFill>
-                <a:latin typeface="Aptos" pitchFamily="34" charset="0"/>
-                <a:ea typeface="Aptos" pitchFamily="34" charset="-122"/>
-                <a:cs typeface="Aptos" pitchFamily="34" charset="-120"/>
-              </a:rPr>
-              <a:t>*Revenue minus assumed staffing and other costs; not net profit.</a:t>
-            </a:r>
-            <a:endParaRPr lang="en-US" sz="850" dirty="0"/>
-          </a:p>
-        </p:txBody>
-      </p:sp>
-      <p:sp>
-        <p:nvSpPr>
-          <p:cNvPr id="39" name="Shape 37"/>
-          <p:cNvSpPr/>
-          <p:nvPr/>
-        </p:nvSpPr>
-        <p:spPr>
-          <a:xfrm>
-            <a:off x="4846320" y="5230368"/>
-            <a:ext cx="5943600" cy="685800"/>
-          </a:xfrm>
-          <a:prstGeom prst="roundRect">
-            <a:avLst>
-              <a:gd name="adj" fmla="val 16000"/>
-            </a:avLst>
-          </a:prstGeom>
-          <a:solidFill>
-            <a:srgbClr val="E5F4F2"/>
-          </a:solidFill>
-          <a:ln w="11430">
-            <a:solidFill>
-              <a:srgbClr val="C9E4E0"/>
-            </a:solidFill>
-            <a:prstDash val="solid"/>
-          </a:ln>
-        </p:spPr>
-      </p:sp>
-      <p:sp>
-        <p:nvSpPr>
-          <p:cNvPr id="40" name="Text 38"/>
-          <p:cNvSpPr/>
-          <p:nvPr/>
-        </p:nvSpPr>
-        <p:spPr>
-          <a:xfrm>
-            <a:off x="5047488" y="5394960"/>
-            <a:ext cx="5532120" cy="384048"/>
-          </a:xfrm>
-          <a:prstGeom prst="rect">
-            <a:avLst/>
-          </a:prstGeom>
-          <a:noFill/>
-          <a:ln/>
-        </p:spPr>
-        <p:txBody>
-          <a:bodyPr wrap="square" lIns="0" tIns="0" rIns="0" bIns="0" rtlCol="0" anchor="ctr">
-            <a:normAutofit/>
-          </a:bodyPr>
-          <a:lstStyle/>
-          <a:p>
-            <a:pPr indent="0" marL="0">
-              <a:buNone/>
-            </a:pPr>
-            <a:r>
-              <a:rPr lang="en-US" sz="1000" b="1" dirty="0">
-                <a:solidFill>
-                  <a:srgbClr val="173747"/>
-                </a:solidFill>
-                <a:latin typeface="Aptos" pitchFamily="34" charset="0"/>
-                <a:ea typeface="Aptos" pitchFamily="34" charset="-122"/>
-                <a:cs typeface="Aptos" pitchFamily="34" charset="-120"/>
-              </a:rPr>
-              <a:t>Time-value illustration: 96 capacity hours / year ≈ $6,240 at $65 loaded hourly cost. Not cash savings.</a:t>
-            </a:r>
-            <a:endParaRPr lang="en-US" sz="1000" dirty="0"/>
-          </a:p>
-        </p:txBody>
-      </p:sp>
-      <p:sp>
-        <p:nvSpPr>
-          <p:cNvPr id="41" name="Text 39"/>
-          <p:cNvSpPr/>
-          <p:nvPr/>
-        </p:nvSpPr>
-        <p:spPr>
-          <a:xfrm>
-            <a:off x="749808" y="5852160"/>
-            <a:ext cx="10698480" cy="210312"/>
-          </a:xfrm>
-          <a:prstGeom prst="rect">
-            <a:avLst/>
-          </a:prstGeom>
-          <a:noFill/>
-          <a:ln/>
-        </p:spPr>
-        <p:txBody>
-          <a:bodyPr wrap="square" lIns="0" tIns="0" rIns="0" bIns="0" rtlCol="0" anchor="ctr">
-            <a:normAutofit/>
-          </a:bodyPr>
-          <a:lstStyle/>
-          <a:p>
-            <a:pPr indent="0" marL="0">
-              <a:buNone/>
-            </a:pPr>
-            <a:r>
-              <a:rPr lang="en-US" sz="850" i="1" dirty="0">
-                <a:solidFill>
-                  <a:srgbClr val="6C808B"/>
-                </a:solidFill>
-                <a:latin typeface="Aptos" pitchFamily="34" charset="0"/>
-                <a:ea typeface="Aptos" pitchFamily="34" charset="-122"/>
-                <a:cs typeface="Aptos" pitchFamily="34" charset="-120"/>
-              </a:rPr>
-              <a:t>20 h/exercise × 40% potential reduction × 12 exercises × $65/h. Assumptions need pilot measurement.</a:t>
-            </a:r>
-            <a:endParaRPr lang="en-US" sz="850" dirty="0"/>
+            <a:off x="4736592" y="5504688"/>
+            <a:ext cx="6263640" cy="219456"/>
+          </a:xfrm>
+          <a:prstGeom prst="rect">
+            <a:avLst/>
+          </a:prstGeom>
+          <a:noFill/>
+          <a:ln/>
+        </p:spPr>
+        <p:txBody>
+          <a:bodyPr wrap="square" lIns="0" tIns="0" rIns="0" bIns="0" rtlCol="0" anchor="ctr">
+            <a:normAutofit/>
+          </a:bodyPr>
+          <a:lstStyle/>
+          <a:p>
+            <a:pPr indent="0" marL="0">
+              <a:buNone/>
+            </a:pPr>
+            <a:r>
+              <a:rPr lang="en-US" sz="1050" b="1" dirty="0">
+                <a:solidFill>
+                  <a:srgbClr val="805E2B"/>
+                </a:solidFill>
+                <a:latin typeface="Aptos" pitchFamily="34" charset="0"/>
+                <a:ea typeface="Aptos" pitchFamily="34" charset="-122"/>
+                <a:cs typeface="Aptos" pitchFamily="34" charset="-120"/>
+              </a:rPr>
+              <a:t>Annual plans and private deployment remain later hypotheses.</a:t>
+            </a:r>
+            <a:endParaRPr lang="en-US" sz="1050" dirty="0"/>
           </a:p>
         </p:txBody>
       </p:sp>
@@ -5401,7 +4575,7 @@
               <a:buNone/>
             </a:pPr>
             <a:r>
-              <a:rPr lang="en-US" sz="940" dirty="0">
+              <a:rPr lang="en-US" sz="920" dirty="0">
                 <a:solidFill>
                   <a:srgbClr val="253E4D"/>
                 </a:solidFill>
@@ -5409,9 +4583,9 @@
                 <a:ea typeface="Aptos" pitchFamily="34" charset="-122"/>
                 <a:cs typeface="Aptos" pitchFamily="34" charset="-120"/>
               </a:rPr>
-              <a:t>One shared demo password. No individual accounts, separate customer workspaces, or deployment security controls.</a:t>
-            </a:r>
-            <a:endParaRPr lang="en-US" sz="940" dirty="0"/>
+              <a:t>Shared demo key; no named accounts, tenant separation, retention controls, or security assessment.</a:t>
+            </a:r>
+            <a:endParaRPr lang="en-US" sz="920" dirty="0"/>
           </a:p>
         </p:txBody>
       </p:sp>
@@ -6473,7 +5647,7 @@
               <a:buNone/>
             </a:pPr>
             <a:r>
-              <a:rPr lang="en-US" sz="1020" dirty="0">
+              <a:rPr lang="en-US" sz="980" dirty="0">
                 <a:solidFill>
                   <a:srgbClr val="253E4D"/>
                 </a:solidFill>
@@ -6481,16 +5655,16 @@
                 <a:ea typeface="Aptos" pitchFamily="34" charset="-122"/>
                 <a:cs typeface="Aptos" pitchFamily="34" charset="-120"/>
               </a:rPr>
-              <a:t>Manual prep time · reviewer edits · semantic citation quality</a:t>
-            </a:r>
-            <a:endParaRPr lang="en-US" sz="1020" dirty="0"/>
-          </a:p>
-          <a:p>
-            <a:pPr indent="0" marL="0">
-              <a:buNone/>
-            </a:pPr>
-            <a:r>
-              <a:rPr lang="en-US" sz="1020" dirty="0">
+              <a:t>Unseen-exercise errors · reviewer edits · semantic citation quality</a:t>
+            </a:r>
+            <a:endParaRPr lang="en-US" sz="980" dirty="0"/>
+          </a:p>
+          <a:p>
+            <a:pPr indent="0" marL="0">
+              <a:buNone/>
+            </a:pPr>
+            <a:r>
+              <a:rPr lang="en-US" sz="980" dirty="0">
                 <a:solidFill>
                   <a:srgbClr val="253E4D"/>
                 </a:solidFill>
@@ -6500,7 +5674,7 @@
               </a:rPr>
               <a:t>ASR WER/latency · local LLM quality and latency</a:t>
             </a:r>
-            <a:endParaRPr lang="en-US" sz="1020" dirty="0"/>
+            <a:endParaRPr lang="en-US" sz="980" dirty="0"/>
           </a:p>
         </p:txBody>
       </p:sp>
@@ -6539,7 +5713,7 @@
                 <a:ea typeface="Aptos" pitchFamily="34" charset="-122"/>
                 <a:cs typeface="Aptos" pitchFamily="34" charset="-120"/>
               </a:rPr>
-              <a:t>Reading the old shorthand: precision = proposed items matching labels; recall = expected labels found. Both were 100% here because rules and labels used the same small scenario.</a:t>
+              <a:t>Precision and recall were 100% because rules and labels used the same small scenario; they do not establish performance on an unfamiliar exercise.</a:t>
             </a:r>
             <a:endParaRPr lang="en-US" sz="930" dirty="0"/>
           </a:p>
@@ -6841,7 +6015,7 @@
               <a:buNone/>
             </a:pPr>
             <a:r>
-              <a:rPr lang="en-US" sz="1600" dirty="0">
+              <a:rPr lang="en-US" sz="1500" dirty="0">
                 <a:solidFill>
                   <a:srgbClr val="C2D4D6"/>
                 </a:solidFill>
@@ -6849,9 +6023,9 @@
                 <a:ea typeface="Aptos" pitchFamily="34" charset="-122"/>
                 <a:cs typeface="Aptos" pitchFamily="34" charset="-120"/>
               </a:rPr>
-              <a:t>Prove that evidence traceability improves reviewer confidence and action follow-through in a real exercise workflow.</a:t>
-            </a:r>
-            <a:endParaRPr lang="en-US" sz="1600" dirty="0"/>
+              <a:t>Compare the current process and DrillLoop on the same permitted hospital exercise records, then test an unfamiliar exercise.</a:t>
+            </a:r>
+            <a:endParaRPr lang="en-US" sz="1500" dirty="0"/>
           </a:p>
         </p:txBody>
       </p:sp>
@@ -6917,7 +6091,7 @@
                 <a:ea typeface="Aptos Display" pitchFamily="34" charset="-122"/>
                 <a:cs typeface="Aptos Display" pitchFamily="34" charset="-120"/>
               </a:rPr>
-              <a:t>2–3 teams</a:t>
+              <a:t>2–3 users</a:t>
             </a:r>
             <a:endParaRPr lang="en-US" sz="2000" dirty="0"/>
           </a:p>
@@ -6958,7 +6132,7 @@
                 <a:ea typeface="Aptos" pitchFamily="34" charset="-122"/>
                 <a:cs typeface="Aptos" pitchFamily="34" charset="-120"/>
               </a:rPr>
-              <a:t>Hospital or municipal exercise evaluators</a:t>
+              <a:t>Prospective hospital-preparedness interviews (proposed)</a:t>
             </a:r>
             <a:endParaRPr lang="en-US" sz="1030" dirty="0"/>
           </a:p>
@@ -7026,7 +6200,7 @@
                 <a:ea typeface="Aptos Display" pitchFamily="34" charset="-122"/>
                 <a:cs typeface="Aptos Display" pitchFamily="34" charset="-120"/>
               </a:rPr>
-              <a:t>90 days</a:t>
+              <a:t>Paired review</a:t>
             </a:r>
             <a:endParaRPr lang="en-US" sz="2000" dirty="0"/>
           </a:p>
@@ -7067,7 +6241,7 @@
                 <a:ea typeface="Aptos" pitchFamily="34" charset="-122"/>
                 <a:cs typeface="Aptos" pitchFamily="34" charset="-120"/>
               </a:rPr>
-              <a:t>Use synthetic or approved records with personal details removed</a:t>
+              <a:t>Same permitted records: existing process and DrillLoop</a:t>
             </a:r>
             <a:endParaRPr lang="en-US" sz="1030" dirty="0"/>
           </a:p>
@@ -7176,7 +6350,7 @@
                 <a:ea typeface="Aptos" pitchFamily="34" charset="-122"/>
                 <a:cs typeface="Aptos" pitchFamily="34" charset="-120"/>
               </a:rPr>
-              <a:t>Review time · corrections · citations · closure proof</a:t>
+              <a:t>Time · misses · corrections · citations · action fields</a:t>
             </a:r>
             <a:endParaRPr lang="en-US" sz="1030" dirty="0"/>
           </a:p>
@@ -7217,7 +6391,7 @@
                 <a:ea typeface="Aptos" pitchFamily="34" charset="-122"/>
                 <a:cs typeface="Aptos" pitchFamily="34" charset="-120"/>
               </a:rPr>
-              <a:t>DrillLoop keeps the evaluator in control.</a:t>
+              <a:t>Partner-defined success thresholds.</a:t>
             </a:r>
             <a:endParaRPr lang="en-US" sz="1600" dirty="0"/>
           </a:p>
@@ -7232,7 +6406,7 @@
         <p:spPr>
           <a:xfrm>
             <a:off x="822960" y="5513832"/>
-            <a:ext cx="7589520" cy="274320"/>
+            <a:ext cx="8229600" cy="274320"/>
           </a:xfrm>
           <a:prstGeom prst="rect">
             <a:avLst/>
@@ -7258,7 +6432,7 @@
                 <a:ea typeface="Aptos" pitchFamily="34" charset="-122"/>
                 <a:cs typeface="Aptos" pitchFamily="34" charset="-120"/>
               </a:rPr>
-              <a:t>Proposed findings stay proposed. Corrective actions close only after reviewer confirmation.</a:t>
+              <a:t>No pilot partner, interviews, baseline, or performance targets are confirmed.</a:t>
             </a:r>
             <a:endParaRPr lang="en-US" sz="1100" dirty="0"/>
           </a:p>
@@ -14604,7 +13778,7 @@
                 <a:ea typeface="Aptos Display" pitchFamily="34" charset="-122"/>
                 <a:cs typeface="Aptos Display" pitchFamily="34" charset="-120"/>
               </a:rPr>
-              <a:t>Start where exercise evidence and follow-through meet</a:t>
+              <a:t>Start with a hospital exercise review</a:t>
             </a:r>
             <a:endParaRPr lang="en-US" sz="2600" dirty="0"/>
           </a:p>
@@ -14645,7 +13819,7 @@
                 <a:ea typeface="Aptos" pitchFamily="34" charset="-122"/>
                 <a:cs typeface="Aptos" pitchFamily="34" charset="-120"/>
               </a:rPr>
-              <a:t>A hospital preparedness team is the first pilot hypothesis, not a validated customer segment.</a:t>
+              <a:t>This is a proposed first use case; no pilot partner or buyer has been confirmed.</a:t>
             </a:r>
             <a:endParaRPr lang="en-US" sz="1130" dirty="0"/>
           </a:p>
@@ -14800,7 +13974,7 @@
                 <a:ea typeface="Aptos Display" pitchFamily="34" charset="-122"/>
                 <a:cs typeface="Aptos Display" pitchFamily="34" charset="-120"/>
               </a:rPr>
-              <a:t>preparedness lead</a:t>
+              <a:t>tabletop review</a:t>
             </a:r>
             <a:endParaRPr lang="en-US" sz="2200" dirty="0"/>
           </a:p>
@@ -14815,7 +13989,7 @@
         <p:spPr>
           <a:xfrm>
             <a:off x="987552" y="3813048"/>
-            <a:ext cx="2514600" cy="694944"/>
+            <a:ext cx="2514600" cy="749808"/>
           </a:xfrm>
           <a:prstGeom prst="rect">
             <a:avLst/>
@@ -14833,7 +14007,7 @@
               <a:buNone/>
             </a:pPr>
             <a:r>
-              <a:rPr lang="en-US" sz="1100" dirty="0">
+              <a:rPr lang="en-US" sz="1050" dirty="0">
                 <a:solidFill>
                   <a:srgbClr val="C2D4D6"/>
                 </a:solidFill>
@@ -14841,9 +14015,9 @@
                 <a:ea typeface="Aptos" pitchFamily="34" charset="-122"/>
                 <a:cs typeface="Aptos" pitchFamily="34" charset="-120"/>
               </a:rPr>
-              <a:t>Owns exercise planning, evaluation coordination, and improvement follow-up.</a:t>
-            </a:r>
-            <a:endParaRPr lang="en-US" sz="1100" dirty="0"/>
+              <a:t>Initial segment hypothesis. The included outage exercise is synthetic; no hospital partner is confirmed.</a:t>
+            </a:r>
+            <a:endParaRPr lang="en-US" sz="1050" dirty="0"/>
           </a:p>
         </p:txBody>
       </p:sp>
@@ -14909,7 +14083,7 @@
                 <a:ea typeface="Aptos" pitchFamily="34" charset="-122"/>
                 <a:cs typeface="Aptos" pitchFamily="34" charset="-120"/>
               </a:rPr>
-              <a:t>Evaluator</a:t>
+              <a:t>Report preparer</a:t>
             </a:r>
             <a:endParaRPr lang="en-US" sz="1200" dirty="0"/>
           </a:p>
@@ -14950,7 +14124,7 @@
                 <a:ea typeface="Aptos" pitchFamily="34" charset="-122"/>
                 <a:cs typeface="Aptos" pitchFamily="34" charset="-120"/>
               </a:rPr>
-              <a:t>Captures observations and confirms findings.</a:t>
+              <a:t>Exercise evaluator / preparedness staff (candidate user).</a:t>
             </a:r>
             <a:endParaRPr lang="en-US" sz="900" dirty="0"/>
           </a:p>
@@ -15018,7 +14192,7 @@
                 <a:ea typeface="Aptos" pitchFamily="34" charset="-122"/>
                 <a:cs typeface="Aptos" pitchFamily="34" charset="-120"/>
               </a:rPr>
-              <a:t>Action owner</a:t>
+              <a:t>Report approver</a:t>
             </a:r>
             <a:endParaRPr lang="en-US" sz="1200" dirty="0"/>
           </a:p>
@@ -15059,7 +14233,7 @@
                 <a:ea typeface="Aptos" pitchFamily="34" charset="-122"/>
                 <a:cs typeface="Aptos" pitchFamily="34" charset="-120"/>
               </a:rPr>
-              <a:t>Delivers task and submits closure evidence.</a:t>
+              <a:t>Preparedness lead or exercise sponsor (candidate).</a:t>
             </a:r>
             <a:endParaRPr lang="en-US" sz="900" dirty="0"/>
           </a:p>
@@ -15127,7 +14301,7 @@
                 <a:ea typeface="Aptos" pitchFamily="34" charset="-122"/>
                 <a:cs typeface="Aptos" pitchFamily="34" charset="-120"/>
               </a:rPr>
-              <a:t>Preparedness director</a:t>
+              <a:t>Budget owner</a:t>
             </a:r>
             <a:endParaRPr lang="en-US" sz="1200" dirty="0"/>
           </a:p>
@@ -15168,7 +14342,7 @@
                 <a:ea typeface="Aptos" pitchFamily="34" charset="-122"/>
                 <a:cs typeface="Aptos" pitchFamily="34" charset="-120"/>
               </a:rPr>
-              <a:t>Reviews open risks, trends, and readiness.</a:t>
+              <a:t>Not identified; role to validate in discovery.</a:t>
             </a:r>
             <a:endParaRPr lang="en-US" sz="900" dirty="0"/>
           </a:p>
@@ -15209,7 +14383,7 @@
                 <a:ea typeface="Aptos" pitchFamily="34" charset="-122"/>
                 <a:cs typeface="Aptos" pitchFamily="34" charset="-120"/>
               </a:rPr>
-              <a:t>Adjacent customer candidates</a:t>
+              <a:t>Roles to validate</a:t>
             </a:r>
             <a:endParaRPr lang="en-US" sz="1300" dirty="0"/>
           </a:p>
@@ -15223,12 +14397,12 @@
         </p:nvSpPr>
         <p:spPr>
           <a:xfrm>
-            <a:off x="8138160" y="2304288"/>
-            <a:ext cx="3246120" cy="603504"/>
+            <a:off x="8138160" y="2331720"/>
+            <a:ext cx="3246120" cy="694944"/>
           </a:xfrm>
           <a:prstGeom prst="roundRect">
             <a:avLst>
-              <a:gd name="adj" fmla="val 18182"/>
+              <a:gd name="adj" fmla="val 15789"/>
             </a:avLst>
           </a:prstGeom>
           <a:solidFill>
@@ -15250,18 +14424,20 @@
         </p:nvSpPr>
         <p:spPr>
           <a:xfrm>
-            <a:off x="8357616" y="2532888"/>
-            <a:ext cx="118872" cy="118872"/>
-          </a:xfrm>
-          <a:prstGeom prst="ellipse">
-            <a:avLst/>
+            <a:off x="8302752" y="2514600"/>
+            <a:ext cx="320040" cy="265176"/>
+          </a:xfrm>
+          <a:prstGeom prst="roundRect">
+            <a:avLst>
+              <a:gd name="adj" fmla="val 41379"/>
+            </a:avLst>
           </a:prstGeom>
           <a:solidFill>
-            <a:srgbClr val="0D8F89"/>
+            <a:srgbClr val="E5F4F2"/>
           </a:solidFill>
           <a:ln w="12700">
             <a:solidFill>
-              <a:srgbClr val="0D8F89">
+              <a:srgbClr val="E5F4F2">
                 <a:alpha val="0"/>
               </a:srgbClr>
             </a:solidFill>
@@ -15277,26 +14453,67 @@
         </p:nvSpPr>
         <p:spPr>
           <a:xfrm>
-            <a:off x="8622792" y="2450592"/>
-            <a:ext cx="2487168" cy="292608"/>
-          </a:xfrm>
-          <a:prstGeom prst="rect">
-            <a:avLst/>
-          </a:prstGeom>
-          <a:noFill/>
-          <a:ln/>
-        </p:spPr>
-        <p:txBody>
-          <a:bodyPr wrap="square" lIns="0" tIns="0" rIns="0" bIns="0" rtlCol="0" anchor="ctr">
-            <a:normAutofit/>
-          </a:bodyPr>
-          <a:lstStyle/>
-          <a:p>
-            <a:pPr indent="0" marL="0">
-              <a:buNone/>
-            </a:pPr>
-            <a:r>
-              <a:rPr lang="en-US" sz="1000" dirty="0">
+            <a:off x="8375904" y="2528316"/>
+            <a:ext cx="173736" cy="219456"/>
+          </a:xfrm>
+          <a:prstGeom prst="rect">
+            <a:avLst/>
+          </a:prstGeom>
+          <a:noFill/>
+          <a:ln/>
+        </p:spPr>
+        <p:txBody>
+          <a:bodyPr wrap="square" lIns="0" tIns="0" rIns="0" bIns="0" rtlCol="0" anchor="ctr">
+            <a:normAutofit/>
+          </a:bodyPr>
+          <a:lstStyle/>
+          <a:p>
+            <a:pPr algn="ctr" indent="0" marL="0">
+              <a:buNone/>
+            </a:pPr>
+            <a:r>
+              <a:rPr lang="en-US" sz="850" b="1" dirty="0">
+                <a:solidFill>
+                  <a:srgbClr val="0D8F89"/>
+                </a:solidFill>
+                <a:latin typeface="Aptos" pitchFamily="34" charset="0"/>
+                <a:ea typeface="Aptos" pitchFamily="34" charset="-122"/>
+                <a:cs typeface="Aptos" pitchFamily="34" charset="-120"/>
+              </a:rPr>
+              <a:t>1</a:t>
+            </a:r>
+            <a:endParaRPr lang="en-US" sz="850" dirty="0"/>
+          </a:p>
+        </p:txBody>
+      </p:sp>
+      <p:sp>
+        <p:nvSpPr>
+          <p:cNvPr id="23" name="Text 21"/>
+          <p:cNvSpPr/>
+          <p:nvPr/>
+        </p:nvSpPr>
+        <p:spPr>
+          <a:xfrm>
+            <a:off x="8759952" y="2487168"/>
+            <a:ext cx="2331720" cy="365760"/>
+          </a:xfrm>
+          <a:prstGeom prst="rect">
+            <a:avLst/>
+          </a:prstGeom>
+          <a:noFill/>
+          <a:ln/>
+        </p:spPr>
+        <p:txBody>
+          <a:bodyPr wrap="square" lIns="0" tIns="0" rIns="0" bIns="0" rtlCol="0" anchor="ctr">
+            <a:normAutofit/>
+          </a:bodyPr>
+          <a:lstStyle/>
+          <a:p>
+            <a:pPr indent="0" marL="0">
+              <a:buNone/>
+            </a:pPr>
+            <a:r>
+              <a:rPr lang="en-US" sz="1040" b="1" dirty="0">
                 <a:solidFill>
                   <a:srgbClr val="253E4D"/>
                 </a:solidFill>
@@ -15304,26 +14521,26 @@
                 <a:ea typeface="Aptos" pitchFamily="34" charset="-122"/>
                 <a:cs typeface="Aptos" pitchFamily="34" charset="-120"/>
               </a:rPr>
-              <a:t>Municipal emergency teams</a:t>
-            </a:r>
-            <a:endParaRPr lang="en-US" sz="1000" dirty="0"/>
-          </a:p>
-        </p:txBody>
-      </p:sp>
-      <p:sp>
-        <p:nvSpPr>
-          <p:cNvPr id="23" name="Shape 21"/>
-          <p:cNvSpPr/>
-          <p:nvPr/>
-        </p:nvSpPr>
-        <p:spPr>
-          <a:xfrm>
-            <a:off x="8138160" y="3081528"/>
-            <a:ext cx="3246120" cy="603504"/>
+              <a:t>Who prepares the AAR/IP?</a:t>
+            </a:r>
+            <a:endParaRPr lang="en-US" sz="1040" dirty="0"/>
+          </a:p>
+        </p:txBody>
+      </p:sp>
+      <p:sp>
+        <p:nvSpPr>
+          <p:cNvPr id="24" name="Shape 22"/>
+          <p:cNvSpPr/>
+          <p:nvPr/>
+        </p:nvSpPr>
+        <p:spPr>
+          <a:xfrm>
+            <a:off x="8138160" y="3200400"/>
+            <a:ext cx="3246120" cy="694944"/>
           </a:xfrm>
           <a:prstGeom prst="roundRect">
             <a:avLst>
-              <a:gd name="adj" fmla="val 18182"/>
+              <a:gd name="adj" fmla="val 15789"/>
             </a:avLst>
           </a:prstGeom>
           <a:solidFill>
@@ -15339,24 +14556,26 @@
       </p:sp>
       <p:sp>
         <p:nvSpPr>
-          <p:cNvPr id="24" name="Shape 22"/>
-          <p:cNvSpPr/>
-          <p:nvPr/>
-        </p:nvSpPr>
-        <p:spPr>
-          <a:xfrm>
-            <a:off x="8357616" y="3310128"/>
-            <a:ext cx="118872" cy="118872"/>
-          </a:xfrm>
-          <a:prstGeom prst="ellipse">
-            <a:avLst/>
+          <p:cNvPr id="25" name="Shape 23"/>
+          <p:cNvSpPr/>
+          <p:nvPr/>
+        </p:nvSpPr>
+        <p:spPr>
+          <a:xfrm>
+            <a:off x="8302752" y="3383280"/>
+            <a:ext cx="320040" cy="265176"/>
+          </a:xfrm>
+          <a:prstGeom prst="roundRect">
+            <a:avLst>
+              <a:gd name="adj" fmla="val 41379"/>
+            </a:avLst>
           </a:prstGeom>
           <a:solidFill>
-            <a:srgbClr val="0D8F89"/>
+            <a:srgbClr val="E5F4F2"/>
           </a:solidFill>
           <a:ln w="12700">
             <a:solidFill>
-              <a:srgbClr val="0D8F89">
+              <a:srgbClr val="E5F4F2">
                 <a:alpha val="0"/>
               </a:srgbClr>
             </a:solidFill>
@@ -15366,32 +14585,73 @@
       </p:sp>
       <p:sp>
         <p:nvSpPr>
-          <p:cNvPr id="25" name="Text 23"/>
-          <p:cNvSpPr/>
-          <p:nvPr/>
-        </p:nvSpPr>
-        <p:spPr>
-          <a:xfrm>
-            <a:off x="8622792" y="3227832"/>
-            <a:ext cx="2487168" cy="292608"/>
-          </a:xfrm>
-          <a:prstGeom prst="rect">
-            <a:avLst/>
-          </a:prstGeom>
-          <a:noFill/>
-          <a:ln/>
-        </p:spPr>
-        <p:txBody>
-          <a:bodyPr wrap="square" lIns="0" tIns="0" rIns="0" bIns="0" rtlCol="0" anchor="ctr">
-            <a:normAutofit/>
-          </a:bodyPr>
-          <a:lstStyle/>
-          <a:p>
-            <a:pPr indent="0" marL="0">
-              <a:buNone/>
-            </a:pPr>
-            <a:r>
-              <a:rPr lang="en-US" sz="1000" dirty="0">
+          <p:cNvPr id="26" name="Text 24"/>
+          <p:cNvSpPr/>
+          <p:nvPr/>
+        </p:nvSpPr>
+        <p:spPr>
+          <a:xfrm>
+            <a:off x="8375904" y="3396996"/>
+            <a:ext cx="173736" cy="219456"/>
+          </a:xfrm>
+          <a:prstGeom prst="rect">
+            <a:avLst/>
+          </a:prstGeom>
+          <a:noFill/>
+          <a:ln/>
+        </p:spPr>
+        <p:txBody>
+          <a:bodyPr wrap="square" lIns="0" tIns="0" rIns="0" bIns="0" rtlCol="0" anchor="ctr">
+            <a:normAutofit/>
+          </a:bodyPr>
+          <a:lstStyle/>
+          <a:p>
+            <a:pPr algn="ctr" indent="0" marL="0">
+              <a:buNone/>
+            </a:pPr>
+            <a:r>
+              <a:rPr lang="en-US" sz="850" b="1" dirty="0">
+                <a:solidFill>
+                  <a:srgbClr val="0D8F89"/>
+                </a:solidFill>
+                <a:latin typeface="Aptos" pitchFamily="34" charset="0"/>
+                <a:ea typeface="Aptos" pitchFamily="34" charset="-122"/>
+                <a:cs typeface="Aptos" pitchFamily="34" charset="-120"/>
+              </a:rPr>
+              <a:t>2</a:t>
+            </a:r>
+            <a:endParaRPr lang="en-US" sz="850" dirty="0"/>
+          </a:p>
+        </p:txBody>
+      </p:sp>
+      <p:sp>
+        <p:nvSpPr>
+          <p:cNvPr id="27" name="Text 25"/>
+          <p:cNvSpPr/>
+          <p:nvPr/>
+        </p:nvSpPr>
+        <p:spPr>
+          <a:xfrm>
+            <a:off x="8759952" y="3355848"/>
+            <a:ext cx="2331720" cy="365760"/>
+          </a:xfrm>
+          <a:prstGeom prst="rect">
+            <a:avLst/>
+          </a:prstGeom>
+          <a:noFill/>
+          <a:ln/>
+        </p:spPr>
+        <p:txBody>
+          <a:bodyPr wrap="square" lIns="0" tIns="0" rIns="0" bIns="0" rtlCol="0" anchor="ctr">
+            <a:normAutofit/>
+          </a:bodyPr>
+          <a:lstStyle/>
+          <a:p>
+            <a:pPr indent="0" marL="0">
+              <a:buNone/>
+            </a:pPr>
+            <a:r>
+              <a:rPr lang="en-US" sz="1040" b="1" dirty="0">
                 <a:solidFill>
                   <a:srgbClr val="253E4D"/>
                 </a:solidFill>
@@ -15399,26 +14659,26 @@
                 <a:ea typeface="Aptos" pitchFamily="34" charset="-122"/>
                 <a:cs typeface="Aptos" pitchFamily="34" charset="-120"/>
               </a:rPr>
-              <a:t>Airports &amp; critical infrastructure</a:t>
-            </a:r>
-            <a:endParaRPr lang="en-US" sz="1000" dirty="0"/>
-          </a:p>
-        </p:txBody>
-      </p:sp>
-      <p:sp>
-        <p:nvSpPr>
-          <p:cNvPr id="26" name="Shape 24"/>
-          <p:cNvSpPr/>
-          <p:nvPr/>
-        </p:nvSpPr>
-        <p:spPr>
-          <a:xfrm>
-            <a:off x="8138160" y="3858768"/>
-            <a:ext cx="3246120" cy="603504"/>
+              <a:t>Who approves findings?</a:t>
+            </a:r>
+            <a:endParaRPr lang="en-US" sz="1040" dirty="0"/>
+          </a:p>
+        </p:txBody>
+      </p:sp>
+      <p:sp>
+        <p:nvSpPr>
+          <p:cNvPr id="28" name="Shape 26"/>
+          <p:cNvSpPr/>
+          <p:nvPr/>
+        </p:nvSpPr>
+        <p:spPr>
+          <a:xfrm>
+            <a:off x="8138160" y="4069080"/>
+            <a:ext cx="3246120" cy="694944"/>
           </a:xfrm>
           <a:prstGeom prst="roundRect">
             <a:avLst>
-              <a:gd name="adj" fmla="val 18182"/>
+              <a:gd name="adj" fmla="val 15789"/>
             </a:avLst>
           </a:prstGeom>
           <a:solidFill>
@@ -15434,24 +14694,26 @@
       </p:sp>
       <p:sp>
         <p:nvSpPr>
-          <p:cNvPr id="27" name="Shape 25"/>
-          <p:cNvSpPr/>
-          <p:nvPr/>
-        </p:nvSpPr>
-        <p:spPr>
-          <a:xfrm>
-            <a:off x="8357616" y="4087368"/>
-            <a:ext cx="118872" cy="118872"/>
-          </a:xfrm>
-          <a:prstGeom prst="ellipse">
-            <a:avLst/>
+          <p:cNvPr id="29" name="Shape 27"/>
+          <p:cNvSpPr/>
+          <p:nvPr/>
+        </p:nvSpPr>
+        <p:spPr>
+          <a:xfrm>
+            <a:off x="8302752" y="4251960"/>
+            <a:ext cx="320040" cy="265176"/>
+          </a:xfrm>
+          <a:prstGeom prst="roundRect">
+            <a:avLst>
+              <a:gd name="adj" fmla="val 41379"/>
+            </a:avLst>
           </a:prstGeom>
           <a:solidFill>
-            <a:srgbClr val="0D8F89"/>
+            <a:srgbClr val="E5F4F2"/>
           </a:solidFill>
           <a:ln w="12700">
             <a:solidFill>
-              <a:srgbClr val="0D8F89">
+              <a:srgbClr val="E5F4F2">
                 <a:alpha val="0"/>
               </a:srgbClr>
             </a:solidFill>
@@ -15461,32 +14723,73 @@
       </p:sp>
       <p:sp>
         <p:nvSpPr>
-          <p:cNvPr id="28" name="Text 26"/>
-          <p:cNvSpPr/>
-          <p:nvPr/>
-        </p:nvSpPr>
-        <p:spPr>
-          <a:xfrm>
-            <a:off x="8622792" y="4005072"/>
-            <a:ext cx="2487168" cy="292608"/>
-          </a:xfrm>
-          <a:prstGeom prst="rect">
-            <a:avLst/>
-          </a:prstGeom>
-          <a:noFill/>
-          <a:ln/>
-        </p:spPr>
-        <p:txBody>
-          <a:bodyPr wrap="square" lIns="0" tIns="0" rIns="0" bIns="0" rtlCol="0" anchor="ctr">
-            <a:normAutofit/>
-          </a:bodyPr>
-          <a:lstStyle/>
-          <a:p>
-            <a:pPr indent="0" marL="0">
-              <a:buNone/>
-            </a:pPr>
-            <a:r>
-              <a:rPr lang="en-US" sz="1000" dirty="0">
+          <p:cNvPr id="30" name="Text 28"/>
+          <p:cNvSpPr/>
+          <p:nvPr/>
+        </p:nvSpPr>
+        <p:spPr>
+          <a:xfrm>
+            <a:off x="8375904" y="4265676"/>
+            <a:ext cx="173736" cy="219456"/>
+          </a:xfrm>
+          <a:prstGeom prst="rect">
+            <a:avLst/>
+          </a:prstGeom>
+          <a:noFill/>
+          <a:ln/>
+        </p:spPr>
+        <p:txBody>
+          <a:bodyPr wrap="square" lIns="0" tIns="0" rIns="0" bIns="0" rtlCol="0" anchor="ctr">
+            <a:normAutofit/>
+          </a:bodyPr>
+          <a:lstStyle/>
+          <a:p>
+            <a:pPr algn="ctr" indent="0" marL="0">
+              <a:buNone/>
+            </a:pPr>
+            <a:r>
+              <a:rPr lang="en-US" sz="850" b="1" dirty="0">
+                <a:solidFill>
+                  <a:srgbClr val="0D8F89"/>
+                </a:solidFill>
+                <a:latin typeface="Aptos" pitchFamily="34" charset="0"/>
+                <a:ea typeface="Aptos" pitchFamily="34" charset="-122"/>
+                <a:cs typeface="Aptos" pitchFamily="34" charset="-120"/>
+              </a:rPr>
+              <a:t>3</a:t>
+            </a:r>
+            <a:endParaRPr lang="en-US" sz="850" dirty="0"/>
+          </a:p>
+        </p:txBody>
+      </p:sp>
+      <p:sp>
+        <p:nvSpPr>
+          <p:cNvPr id="31" name="Text 29"/>
+          <p:cNvSpPr/>
+          <p:nvPr/>
+        </p:nvSpPr>
+        <p:spPr>
+          <a:xfrm>
+            <a:off x="8759952" y="4224528"/>
+            <a:ext cx="2331720" cy="365760"/>
+          </a:xfrm>
+          <a:prstGeom prst="rect">
+            <a:avLst/>
+          </a:prstGeom>
+          <a:noFill/>
+          <a:ln/>
+        </p:spPr>
+        <p:txBody>
+          <a:bodyPr wrap="square" lIns="0" tIns="0" rIns="0" bIns="0" rtlCol="0" anchor="ctr">
+            <a:normAutofit/>
+          </a:bodyPr>
+          <a:lstStyle/>
+          <a:p>
+            <a:pPr indent="0" marL="0">
+              <a:buNone/>
+            </a:pPr>
+            <a:r>
+              <a:rPr lang="en-US" sz="1040" b="1" dirty="0">
                 <a:solidFill>
                   <a:srgbClr val="253E4D"/>
                 </a:solidFill>
@@ -15494,15 +14797,15 @@
                 <a:ea typeface="Aptos" pitchFamily="34" charset="-122"/>
                 <a:cs typeface="Aptos" pitchFamily="34" charset="-120"/>
               </a:rPr>
-              <a:t>Civil defense &amp; training providers</a:t>
-            </a:r>
-            <a:endParaRPr lang="en-US" sz="1000" dirty="0"/>
-          </a:p>
-        </p:txBody>
-      </p:sp>
-      <p:sp>
-        <p:nvSpPr>
-          <p:cNvPr id="29" name="Shape 27"/>
+              <a:t>Who controls the budget?</a:t>
+            </a:r>
+            <a:endParaRPr lang="en-US" sz="1040" dirty="0"/>
+          </a:p>
+        </p:txBody>
+      </p:sp>
+      <p:sp>
+        <p:nvSpPr>
+          <p:cNvPr id="32" name="Shape 30"/>
           <p:cNvSpPr/>
           <p:nvPr/>
         </p:nvSpPr>
@@ -15529,7 +14832,7 @@
       </p:sp>
       <p:sp>
         <p:nvSpPr>
-          <p:cNvPr id="30" name="Text 28"/>
+          <p:cNvPr id="33" name="Text 31"/>
           <p:cNvSpPr/>
           <p:nvPr/>
         </p:nvSpPr>
@@ -15562,7 +14865,7 @@
                 <a:ea typeface="Aptos" pitchFamily="34" charset="-122"/>
                 <a:cs typeface="Aptos" pitchFamily="34" charset="-120"/>
               </a:rPr>
-              <a:t>Pilot question: Is source-level traceability painful enough to buy or integrate?</a:t>
+              <a:t>No interviews or purchasing-path validation are recorded yet.</a:t>
             </a:r>
             <a:endParaRPr lang="en-US" sz="1100" dirty="0"/>
           </a:p>
